--- a/자구&알고 스터디 2주차.pptx
+++ b/자구&알고 스터디 2주차.pptx
@@ -5,18 +5,23 @@
     <p:sldMasterId id="2147483648" r:id="rId1"/>
   </p:sldMasterIdLst>
   <p:notesMasterIdLst>
-    <p:notesMasterId r:id="rId11"/>
+    <p:notesMasterId r:id="rId16"/>
   </p:notesMasterIdLst>
   <p:sldIdLst>
     <p:sldId id="256" r:id="rId2"/>
-    <p:sldId id="257" r:id="rId3"/>
-    <p:sldId id="263" r:id="rId4"/>
-    <p:sldId id="259" r:id="rId5"/>
-    <p:sldId id="262" r:id="rId6"/>
-    <p:sldId id="261" r:id="rId7"/>
-    <p:sldId id="264" r:id="rId8"/>
-    <p:sldId id="258" r:id="rId9"/>
-    <p:sldId id="265" r:id="rId10"/>
+    <p:sldId id="263" r:id="rId3"/>
+    <p:sldId id="259" r:id="rId4"/>
+    <p:sldId id="271" r:id="rId5"/>
+    <p:sldId id="272" r:id="rId6"/>
+    <p:sldId id="262" r:id="rId7"/>
+    <p:sldId id="261" r:id="rId8"/>
+    <p:sldId id="264" r:id="rId9"/>
+    <p:sldId id="258" r:id="rId10"/>
+    <p:sldId id="266" r:id="rId11"/>
+    <p:sldId id="269" r:id="rId12"/>
+    <p:sldId id="270" r:id="rId13"/>
+    <p:sldId id="268" r:id="rId14"/>
+    <p:sldId id="265" r:id="rId15"/>
   </p:sldIdLst>
   <p:sldSz cx="12192000" cy="6858000"/>
   <p:notesSz cx="6858000" cy="9144000"/>
@@ -205,7 +210,7 @@
           <a:p>
             <a:fld id="{B2EAC852-3943-4D51-80F6-C4AAF313C63C}" type="datetimeFigureOut">
               <a:rPr lang="ko-KR" altLang="en-US" smtClean="0"/>
-              <a:t>2025-09-13</a:t>
+              <a:t>2025-09-21</a:t>
             </a:fld>
             <a:endParaRPr lang="ko-KR" altLang="en-US"/>
           </a:p>
@@ -619,7 +624,7 @@
           <a:p>
             <a:fld id="{80F42074-AB8A-4DE3-842B-2B238FAEC81C}" type="datetimeFigureOut">
               <a:rPr lang="ko-KR" altLang="en-US" smtClean="0"/>
-              <a:t>2025-09-13</a:t>
+              <a:t>2025-09-21</a:t>
             </a:fld>
             <a:endParaRPr lang="ko-KR" altLang="en-US"/>
           </a:p>
@@ -817,7 +822,7 @@
           <a:p>
             <a:fld id="{80F42074-AB8A-4DE3-842B-2B238FAEC81C}" type="datetimeFigureOut">
               <a:rPr lang="ko-KR" altLang="en-US" smtClean="0"/>
-              <a:t>2025-09-13</a:t>
+              <a:t>2025-09-21</a:t>
             </a:fld>
             <a:endParaRPr lang="ko-KR" altLang="en-US"/>
           </a:p>
@@ -1025,7 +1030,7 @@
           <a:p>
             <a:fld id="{80F42074-AB8A-4DE3-842B-2B238FAEC81C}" type="datetimeFigureOut">
               <a:rPr lang="ko-KR" altLang="en-US" smtClean="0"/>
-              <a:t>2025-09-13</a:t>
+              <a:t>2025-09-21</a:t>
             </a:fld>
             <a:endParaRPr lang="ko-KR" altLang="en-US"/>
           </a:p>
@@ -1223,7 +1228,7 @@
           <a:p>
             <a:fld id="{80F42074-AB8A-4DE3-842B-2B238FAEC81C}" type="datetimeFigureOut">
               <a:rPr lang="ko-KR" altLang="en-US" smtClean="0"/>
-              <a:t>2025-09-13</a:t>
+              <a:t>2025-09-21</a:t>
             </a:fld>
             <a:endParaRPr lang="ko-KR" altLang="en-US"/>
           </a:p>
@@ -1498,7 +1503,7 @@
           <a:p>
             <a:fld id="{80F42074-AB8A-4DE3-842B-2B238FAEC81C}" type="datetimeFigureOut">
               <a:rPr lang="ko-KR" altLang="en-US" smtClean="0"/>
-              <a:t>2025-09-13</a:t>
+              <a:t>2025-09-21</a:t>
             </a:fld>
             <a:endParaRPr lang="ko-KR" altLang="en-US"/>
           </a:p>
@@ -1763,7 +1768,7 @@
           <a:p>
             <a:fld id="{80F42074-AB8A-4DE3-842B-2B238FAEC81C}" type="datetimeFigureOut">
               <a:rPr lang="ko-KR" altLang="en-US" smtClean="0"/>
-              <a:t>2025-09-13</a:t>
+              <a:t>2025-09-21</a:t>
             </a:fld>
             <a:endParaRPr lang="ko-KR" altLang="en-US"/>
           </a:p>
@@ -2175,7 +2180,7 @@
           <a:p>
             <a:fld id="{80F42074-AB8A-4DE3-842B-2B238FAEC81C}" type="datetimeFigureOut">
               <a:rPr lang="ko-KR" altLang="en-US" smtClean="0"/>
-              <a:t>2025-09-13</a:t>
+              <a:t>2025-09-21</a:t>
             </a:fld>
             <a:endParaRPr lang="ko-KR" altLang="en-US"/>
           </a:p>
@@ -2316,7 +2321,7 @@
           <a:p>
             <a:fld id="{80F42074-AB8A-4DE3-842B-2B238FAEC81C}" type="datetimeFigureOut">
               <a:rPr lang="ko-KR" altLang="en-US" smtClean="0"/>
-              <a:t>2025-09-13</a:t>
+              <a:t>2025-09-21</a:t>
             </a:fld>
             <a:endParaRPr lang="ko-KR" altLang="en-US"/>
           </a:p>
@@ -2429,7 +2434,7 @@
           <a:p>
             <a:fld id="{80F42074-AB8A-4DE3-842B-2B238FAEC81C}" type="datetimeFigureOut">
               <a:rPr lang="ko-KR" altLang="en-US" smtClean="0"/>
-              <a:t>2025-09-13</a:t>
+              <a:t>2025-09-21</a:t>
             </a:fld>
             <a:endParaRPr lang="ko-KR" altLang="en-US"/>
           </a:p>
@@ -2740,7 +2745,7 @@
           <a:p>
             <a:fld id="{80F42074-AB8A-4DE3-842B-2B238FAEC81C}" type="datetimeFigureOut">
               <a:rPr lang="ko-KR" altLang="en-US" smtClean="0"/>
-              <a:t>2025-09-13</a:t>
+              <a:t>2025-09-21</a:t>
             </a:fld>
             <a:endParaRPr lang="ko-KR" altLang="en-US"/>
           </a:p>
@@ -3028,7 +3033,7 @@
           <a:p>
             <a:fld id="{80F42074-AB8A-4DE3-842B-2B238FAEC81C}" type="datetimeFigureOut">
               <a:rPr lang="ko-KR" altLang="en-US" smtClean="0"/>
-              <a:t>2025-09-13</a:t>
+              <a:t>2025-09-21</a:t>
             </a:fld>
             <a:endParaRPr lang="ko-KR" altLang="en-US"/>
           </a:p>
@@ -3269,7 +3274,7 @@
           <a:p>
             <a:fld id="{80F42074-AB8A-4DE3-842B-2B238FAEC81C}" type="datetimeFigureOut">
               <a:rPr lang="ko-KR" altLang="en-US" smtClean="0"/>
-              <a:t>2025-09-13</a:t>
+              <a:t>2025-09-21</a:t>
             </a:fld>
             <a:endParaRPr lang="ko-KR" altLang="en-US"/>
           </a:p>
@@ -3738,23 +3743,35 @@
             <p:ph type="subTitle" idx="1"/>
           </p:nvPr>
         </p:nvSpPr>
-        <p:spPr/>
+        <p:spPr>
+          <a:xfrm>
+            <a:off x="2438400" y="3619291"/>
+            <a:ext cx="8229600" cy="1655762"/>
+          </a:xfrm>
+        </p:spPr>
         <p:txBody>
           <a:bodyPr/>
           <a:lstStyle/>
           <a:p>
             <a:r>
               <a:rPr lang="ko-KR" altLang="en-US" dirty="0"/>
-              <a:t>재귀</a:t>
+              <a:t>재귀 </a:t>
             </a:r>
             <a:r>
               <a:rPr lang="en-US" altLang="ko-KR" dirty="0"/>
-              <a:t>, </a:t>
-            </a:r>
+              <a:t>(Recursive)</a:t>
+            </a:r>
+          </a:p>
+          <a:p>
             <a:r>
               <a:rPr lang="ko-KR" altLang="en-US" dirty="0"/>
-              <a:t>분할정복</a:t>
-            </a:r>
+              <a:t>분할 정복 </a:t>
+            </a:r>
+            <a:r>
+              <a:rPr lang="en-US" altLang="ko-KR" dirty="0"/>
+              <a:t>(Divide And Conquer)</a:t>
+            </a:r>
+            <a:endParaRPr lang="ko-KR" altLang="en-US" dirty="0"/>
           </a:p>
         </p:txBody>
       </p:sp>
@@ -3771,12 +3788,18 @@
 </p:sld>
 </file>
 
-<file path=ppt/slides/slide2.xml><?xml version="1.0" encoding="utf-8"?>
+<file path=ppt/slides/slide10.xml><?xml version="1.0" encoding="utf-8"?>
 <p:sld xmlns:a="http://schemas.openxmlformats.org/drawingml/2006/main" xmlns:r="http://schemas.openxmlformats.org/officeDocument/2006/relationships" xmlns:p="http://schemas.openxmlformats.org/presentationml/2006/main">
   <p:cSld>
     <p:spTree>
       <p:nvGrpSpPr>
-        <p:cNvPr id="1" name=""/>
+        <p:cNvPr id="1" name="">
+          <a:extLst>
+            <a:ext uri="{FF2B5EF4-FFF2-40B4-BE49-F238E27FC236}">
+              <a16:creationId xmlns:a16="http://schemas.microsoft.com/office/drawing/2014/main" id="{FB08AAE4-C08B-D964-68D2-E2E451D4F277}"/>
+            </a:ext>
+          </a:extLst>
+        </p:cNvPr>
         <p:cNvGrpSpPr/>
         <p:nvPr/>
       </p:nvGrpSpPr>
@@ -3793,7 +3816,7 @@
           <p:cNvPr id="2" name="제목 1">
             <a:extLst>
               <a:ext uri="{FF2B5EF4-FFF2-40B4-BE49-F238E27FC236}">
-                <a16:creationId xmlns:a16="http://schemas.microsoft.com/office/drawing/2014/main" id="{06170C19-FFC8-3478-8D90-3AE5A75D5285}"/>
+                <a16:creationId xmlns:a16="http://schemas.microsoft.com/office/drawing/2014/main" id="{7AAE3493-83BF-0882-63DC-1DC92AF60BC4}"/>
               </a:ext>
             </a:extLst>
           </p:cNvPr>
@@ -3811,68 +3834,342 @@
           <a:p>
             <a:r>
               <a:rPr lang="ko-KR" altLang="en-US" dirty="0"/>
-              <a:t>재귀</a:t>
-            </a:r>
-          </a:p>
-        </p:txBody>
-      </p:sp>
-      <p:sp>
-        <p:nvSpPr>
-          <p:cNvPr id="3" name="내용 개체 틀 2">
-            <a:extLst>
-              <a:ext uri="{FF2B5EF4-FFF2-40B4-BE49-F238E27FC236}">
-                <a16:creationId xmlns:a16="http://schemas.microsoft.com/office/drawing/2014/main" id="{FF10E2B2-13F6-0454-2B02-713806095D5F}"/>
-              </a:ext>
-            </a:extLst>
-          </p:cNvPr>
-          <p:cNvSpPr>
-            <a:spLocks noGrp="1"/>
-          </p:cNvSpPr>
-          <p:nvPr>
-            <p:ph idx="1"/>
-          </p:nvPr>
-        </p:nvSpPr>
-        <p:spPr>
-          <a:xfrm>
-            <a:off x="838200" y="1825625"/>
-            <a:ext cx="10515600" cy="1104388"/>
-          </a:xfrm>
-        </p:spPr>
-        <p:txBody>
-          <a:bodyPr/>
-          <a:lstStyle/>
-          <a:p>
-            <a:r>
-              <a:rPr lang="ko-KR" altLang="en-US" dirty="0"/>
-              <a:t>자기 자신을 호출하는 함수</a:t>
-            </a:r>
-            <a:endParaRPr lang="en-US" altLang="ko-KR" dirty="0"/>
-          </a:p>
-          <a:p>
-            <a:r>
-              <a:rPr lang="ko-KR" altLang="en-US" dirty="0"/>
-              <a:t>예시</a:t>
-            </a:r>
-            <a:r>
-              <a:rPr lang="en-US" altLang="ko-KR" dirty="0"/>
-              <a:t>: </a:t>
-            </a:r>
-          </a:p>
-          <a:p>
-            <a:pPr marL="0" indent="0">
-              <a:buNone/>
-            </a:pPr>
-            <a:endParaRPr lang="en-US" altLang="ko-KR" dirty="0"/>
-          </a:p>
-          <a:p>
-            <a:endParaRPr lang="ko-KR" altLang="en-US" dirty="0"/>
-          </a:p>
-        </p:txBody>
-      </p:sp>
+              <a:t>분할 정복</a:t>
+            </a:r>
+          </a:p>
+        </p:txBody>
+      </p:sp>
+      <mc:AlternateContent xmlns:mc="http://schemas.openxmlformats.org/markup-compatibility/2006" xmlns:a14="http://schemas.microsoft.com/office/drawing/2010/main">
+        <mc:Choice Requires="a14">
+          <p:sp>
+            <p:nvSpPr>
+              <p:cNvPr id="3" name="내용 개체 틀 2">
+                <a:extLst>
+                  <a:ext uri="{FF2B5EF4-FFF2-40B4-BE49-F238E27FC236}">
+                    <a16:creationId xmlns:a16="http://schemas.microsoft.com/office/drawing/2014/main" id="{73DEF856-FD64-731B-2B19-61D4E5A93BE3}"/>
+                  </a:ext>
+                </a:extLst>
+              </p:cNvPr>
+              <p:cNvSpPr>
+                <a:spLocks noGrp="1"/>
+              </p:cNvSpPr>
+              <p:nvPr>
+                <p:ph idx="1"/>
+              </p:nvPr>
+            </p:nvSpPr>
+            <p:spPr/>
+            <p:txBody>
+              <a:bodyPr>
+                <a:normAutofit fontScale="92500" lnSpcReduction="10000"/>
+              </a:bodyPr>
+              <a:lstStyle/>
+              <a:p>
+                <a:pPr>
+                  <a:lnSpc>
+                    <a:spcPct val="150000"/>
+                  </a:lnSpc>
+                </a:pPr>
+                <a:r>
+                  <a:rPr lang="ko-KR" altLang="en-US" dirty="0"/>
+                  <a:t>예시</a:t>
+                </a:r>
+                <a:r>
+                  <a:rPr lang="en-US" altLang="ko-KR" dirty="0"/>
+                  <a:t>: </a:t>
+                </a:r>
+                <a14:m>
+                  <m:oMath xmlns:m="http://schemas.openxmlformats.org/officeDocument/2006/math">
+                    <m:sSup>
+                      <m:sSupPr>
+                        <m:ctrlPr>
+                          <a:rPr lang="en-US" altLang="ko-KR" i="1" smtClean="0">
+                            <a:latin typeface="Cambria Math" panose="02040503050406030204" pitchFamily="18" charset="0"/>
+                          </a:rPr>
+                        </m:ctrlPr>
+                      </m:sSupPr>
+                      <m:e>
+                        <m:r>
+                          <m:rPr>
+                            <m:sty m:val="p"/>
+                          </m:rPr>
+                          <a:rPr lang="en-US" altLang="ko-KR" b="0" i="1" smtClean="0">
+                            <a:latin typeface="Cambria Math" panose="02040503050406030204" pitchFamily="18" charset="0"/>
+                          </a:rPr>
+                          <m:t>a</m:t>
+                        </m:r>
+                      </m:e>
+                      <m:sup>
+                        <m:r>
+                          <m:rPr>
+                            <m:sty m:val="p"/>
+                          </m:rPr>
+                          <a:rPr lang="en-US" altLang="ko-KR" b="0" i="1" smtClean="0">
+                            <a:latin typeface="Cambria Math" panose="02040503050406030204" pitchFamily="18" charset="0"/>
+                          </a:rPr>
+                          <m:t>b</m:t>
+                        </m:r>
+                      </m:sup>
+                    </m:sSup>
+                    <m:r>
+                      <a:rPr lang="en-US" altLang="ko-KR" b="0" i="1" smtClean="0">
+                        <a:latin typeface="Cambria Math" panose="02040503050406030204" pitchFamily="18" charset="0"/>
+                      </a:rPr>
+                      <m:t> </m:t>
+                    </m:r>
+                    <m:r>
+                      <a:rPr lang="en-US" altLang="ko-KR" i="1">
+                        <a:latin typeface="Cambria Math" panose="02040503050406030204" pitchFamily="18" charset="0"/>
+                      </a:rPr>
+                      <m:t>𝑚𝑜𝑑</m:t>
+                    </m:r>
+                    <m:r>
+                      <a:rPr lang="en-US" altLang="ko-KR" i="1">
+                        <a:latin typeface="Cambria Math" panose="02040503050406030204" pitchFamily="18" charset="0"/>
+                      </a:rPr>
+                      <m:t> </m:t>
+                    </m:r>
+                    <m:r>
+                      <m:rPr>
+                        <m:sty m:val="p"/>
+                      </m:rPr>
+                      <a:rPr lang="en-US" altLang="ko-KR" i="1" smtClean="0">
+                        <a:latin typeface="Cambria Math" panose="02040503050406030204" pitchFamily="18" charset="0"/>
+                      </a:rPr>
+                      <m:t>c</m:t>
+                    </m:r>
+                  </m:oMath>
+                </a14:m>
+                <a:r>
+                  <a:rPr lang="en-US" altLang="ko-KR" dirty="0"/>
+                  <a:t> </a:t>
+                </a:r>
+                <a:r>
+                  <a:rPr lang="ko-KR" altLang="en-US" dirty="0"/>
+                  <a:t>빠르게 계산하기</a:t>
+                </a:r>
+                <a:endParaRPr lang="en-US" altLang="ko-KR" dirty="0"/>
+              </a:p>
+              <a:p>
+                <a:pPr lvl="1">
+                  <a:lnSpc>
+                    <a:spcPct val="150000"/>
+                  </a:lnSpc>
+                </a:pPr>
+                <a:r>
+                  <a:rPr lang="ko-KR" altLang="en-US" dirty="0"/>
+                  <a:t>만약 </a:t>
+                </a:r>
+                <a:r>
+                  <a:rPr lang="en-US" altLang="ko-KR" dirty="0"/>
+                  <a:t>b</a:t>
+                </a:r>
+                <a:r>
+                  <a:rPr lang="ko-KR" altLang="en-US" dirty="0"/>
+                  <a:t>가 </a:t>
+                </a:r>
+                <a:r>
+                  <a:rPr lang="en-US" altLang="ko-KR" dirty="0"/>
+                  <a:t>1000</a:t>
+                </a:r>
+                <a:r>
+                  <a:rPr lang="ko-KR" altLang="en-US" dirty="0"/>
+                  <a:t>만 이하라면 어떻게 구현하던 선형 시간 내에 빠르게 해결 가능하다</a:t>
+                </a:r>
+                <a:r>
+                  <a:rPr lang="en-US" altLang="ko-KR" dirty="0"/>
+                  <a:t>.</a:t>
+                </a:r>
+              </a:p>
+              <a:p>
+                <a:pPr lvl="1">
+                  <a:lnSpc>
+                    <a:spcPct val="150000"/>
+                  </a:lnSpc>
+                </a:pPr>
+                <a:r>
+                  <a:rPr lang="ko-KR" altLang="en-US" dirty="0"/>
+                  <a:t>하지만 </a:t>
+                </a:r>
+                <a:r>
+                  <a:rPr lang="en-US" altLang="ko-KR" dirty="0"/>
+                  <a:t>b</a:t>
+                </a:r>
+                <a:r>
+                  <a:rPr lang="ko-KR" altLang="en-US" dirty="0"/>
+                  <a:t>가 </a:t>
+                </a:r>
+                <a:r>
+                  <a:rPr lang="en-US" altLang="ko-KR" dirty="0"/>
+                  <a:t>1</a:t>
+                </a:r>
+                <a:r>
+                  <a:rPr lang="ko-KR" altLang="en-US" dirty="0"/>
+                  <a:t>억 정도 되면 다항 시간 내에 해결해야 한다</a:t>
+                </a:r>
+                <a:r>
+                  <a:rPr lang="en-US" altLang="ko-KR" dirty="0"/>
+                  <a:t>.</a:t>
+                </a:r>
+              </a:p>
+              <a:p>
+                <a:pPr lvl="2">
+                  <a:lnSpc>
+                    <a:spcPct val="150000"/>
+                  </a:lnSpc>
+                </a:pPr>
+                <a:r>
+                  <a:rPr lang="en-US" altLang="ko-KR" dirty="0"/>
+                  <a:t>ex. </a:t>
+                </a:r>
+                <a14:m>
+                  <m:oMath xmlns:m="http://schemas.openxmlformats.org/officeDocument/2006/math">
+                    <m:sSup>
+                      <m:sSupPr>
+                        <m:ctrlPr>
+                          <a:rPr lang="en-US" altLang="ko-KR" i="1" smtClean="0">
+                            <a:latin typeface="Cambria Math" panose="02040503050406030204" pitchFamily="18" charset="0"/>
+                          </a:rPr>
+                        </m:ctrlPr>
+                      </m:sSupPr>
+                      <m:e>
+                        <m:r>
+                          <a:rPr lang="en-US" altLang="ko-KR" b="0" i="1" smtClean="0">
+                            <a:latin typeface="Cambria Math" panose="02040503050406030204" pitchFamily="18" charset="0"/>
+                          </a:rPr>
+                          <m:t>1354757413857</m:t>
+                        </m:r>
+                      </m:e>
+                      <m:sup>
+                        <m:r>
+                          <a:rPr lang="en-US" altLang="ko-KR" b="0" i="1" smtClean="0">
+                            <a:latin typeface="Cambria Math" panose="02040503050406030204" pitchFamily="18" charset="0"/>
+                          </a:rPr>
+                          <m:t>4698764156374654</m:t>
+                        </m:r>
+                      </m:sup>
+                    </m:sSup>
+                    <m:r>
+                      <a:rPr lang="en-US" altLang="ko-KR" b="0" i="1" smtClean="0">
+                        <a:latin typeface="Cambria Math" panose="02040503050406030204" pitchFamily="18" charset="0"/>
+                      </a:rPr>
+                      <m:t> </m:t>
+                    </m:r>
+                    <m:r>
+                      <a:rPr lang="en-US" altLang="ko-KR" b="0" i="1" smtClean="0">
+                        <a:latin typeface="Cambria Math" panose="02040503050406030204" pitchFamily="18" charset="0"/>
+                      </a:rPr>
+                      <m:t>𝑚𝑜𝑑</m:t>
+                    </m:r>
+                    <m:r>
+                      <a:rPr lang="en-US" altLang="ko-KR" b="0" i="1" smtClean="0">
+                        <a:latin typeface="Cambria Math" panose="02040503050406030204" pitchFamily="18" charset="0"/>
+                      </a:rPr>
+                      <m:t> 368561265741</m:t>
+                    </m:r>
+                  </m:oMath>
+                </a14:m>
+                <a:endParaRPr lang="en-US" altLang="ko-KR" b="0" dirty="0"/>
+              </a:p>
+              <a:p>
+                <a:pPr lvl="1">
+                  <a:lnSpc>
+                    <a:spcPct val="150000"/>
+                  </a:lnSpc>
+                </a:pPr>
+                <a:r>
+                  <a:rPr lang="ko-KR" altLang="en-US" dirty="0"/>
+                  <a:t>이 때</a:t>
+                </a:r>
+                <a:r>
+                  <a:rPr lang="en-US" altLang="ko-KR" dirty="0"/>
+                  <a:t>, </a:t>
+                </a:r>
+                <a:r>
+                  <a:rPr lang="ko-KR" altLang="en-US" dirty="0"/>
+                  <a:t>우리는 분할 정복을 이용할 수 있다</a:t>
+                </a:r>
+                <a:r>
+                  <a:rPr lang="en-US" altLang="ko-KR" dirty="0"/>
+                  <a:t>.</a:t>
+                </a:r>
+              </a:p>
+              <a:p>
+                <a:pPr lvl="2">
+                  <a:lnSpc>
+                    <a:spcPct val="150000"/>
+                  </a:lnSpc>
+                </a:pPr>
+                <a:r>
+                  <a:rPr lang="ko-KR" altLang="en-US" dirty="0"/>
+                  <a:t>어디까지 분할해야 충분히 작은 문제일까</a:t>
+                </a:r>
+                <a:r>
+                  <a:rPr lang="en-US" altLang="ko-KR" dirty="0"/>
+                  <a:t>?</a:t>
+                </a:r>
+              </a:p>
+              <a:p>
+                <a:pPr lvl="2">
+                  <a:lnSpc>
+                    <a:spcPct val="150000"/>
+                  </a:lnSpc>
+                </a:pPr>
+                <a:r>
+                  <a:rPr lang="ko-KR" altLang="en-US" dirty="0"/>
+                  <a:t>분할해서 가져온 결과를 어떻게 사용해야 할까</a:t>
+                </a:r>
+                <a:r>
+                  <a:rPr lang="en-US" altLang="ko-KR" dirty="0"/>
+                  <a:t>?</a:t>
+                </a:r>
+              </a:p>
+            </p:txBody>
+          </p:sp>
+        </mc:Choice>
+        <mc:Fallback xmlns="">
+          <p:sp>
+            <p:nvSpPr>
+              <p:cNvPr id="3" name="내용 개체 틀 2">
+                <a:extLst>
+                  <a:ext uri="{FF2B5EF4-FFF2-40B4-BE49-F238E27FC236}">
+                    <a16:creationId xmlns:a16="http://schemas.microsoft.com/office/drawing/2014/main" id="{73DEF856-FD64-731B-2B19-61D4E5A93BE3}"/>
+                  </a:ext>
+                </a:extLst>
+              </p:cNvPr>
+              <p:cNvSpPr>
+                <a:spLocks noGrp="1" noRot="1" noChangeAspect="1" noMove="1" noResize="1" noEditPoints="1" noAdjustHandles="1" noChangeArrowheads="1" noChangeShapeType="1" noTextEdit="1"/>
+              </p:cNvSpPr>
+              <p:nvPr>
+                <p:ph idx="1"/>
+              </p:nvPr>
+            </p:nvSpPr>
+            <p:spPr>
+              <a:blipFill>
+                <a:blip r:embed="rId2"/>
+                <a:stretch>
+                  <a:fillRect l="-928"/>
+                </a:stretch>
+              </a:blipFill>
+            </p:spPr>
+            <p:txBody>
+              <a:bodyPr/>
+              <a:lstStyle/>
+              <a:p>
+                <a:r>
+                  <a:rPr lang="ko-KR" altLang="en-US">
+                    <a:noFill/>
+                  </a:rPr>
+                  <a:t> </a:t>
+                </a:r>
+              </a:p>
+            </p:txBody>
+          </p:sp>
+        </mc:Fallback>
+      </mc:AlternateContent>
     </p:spTree>
     <p:extLst>
       <p:ext uri="{BB962C8B-B14F-4D97-AF65-F5344CB8AC3E}">
-        <p14:creationId xmlns:p14="http://schemas.microsoft.com/office/powerpoint/2010/main" val="3221337934"/>
+        <p14:creationId xmlns:p14="http://schemas.microsoft.com/office/powerpoint/2010/main" val="247551695"/>
       </p:ext>
     </p:extLst>
   </p:cSld>
@@ -3882,7 +4179,2048 @@
 </p:sld>
 </file>
 
-<file path=ppt/slides/slide3.xml><?xml version="1.0" encoding="utf-8"?>
+<file path=ppt/slides/slide11.xml><?xml version="1.0" encoding="utf-8"?>
+<p:sld xmlns:a="http://schemas.openxmlformats.org/drawingml/2006/main" xmlns:r="http://schemas.openxmlformats.org/officeDocument/2006/relationships" xmlns:p="http://schemas.openxmlformats.org/presentationml/2006/main">
+  <p:cSld>
+    <p:spTree>
+      <p:nvGrpSpPr>
+        <p:cNvPr id="1" name="">
+          <a:extLst>
+            <a:ext uri="{FF2B5EF4-FFF2-40B4-BE49-F238E27FC236}">
+              <a16:creationId xmlns:a16="http://schemas.microsoft.com/office/drawing/2014/main" id="{E41EE711-BBF9-72A7-1BA4-43DD2F8BF6E3}"/>
+            </a:ext>
+          </a:extLst>
+        </p:cNvPr>
+        <p:cNvGrpSpPr/>
+        <p:nvPr/>
+      </p:nvGrpSpPr>
+      <p:grpSpPr>
+        <a:xfrm>
+          <a:off x="0" y="0"/>
+          <a:ext cx="0" cy="0"/>
+          <a:chOff x="0" y="0"/>
+          <a:chExt cx="0" cy="0"/>
+        </a:xfrm>
+      </p:grpSpPr>
+      <p:sp>
+        <p:nvSpPr>
+          <p:cNvPr id="2" name="제목 1">
+            <a:extLst>
+              <a:ext uri="{FF2B5EF4-FFF2-40B4-BE49-F238E27FC236}">
+                <a16:creationId xmlns:a16="http://schemas.microsoft.com/office/drawing/2014/main" id="{D3BB7411-6F21-C55D-1E57-D000A5DB2F05}"/>
+              </a:ext>
+            </a:extLst>
+          </p:cNvPr>
+          <p:cNvSpPr>
+            <a:spLocks noGrp="1"/>
+          </p:cNvSpPr>
+          <p:nvPr>
+            <p:ph type="title"/>
+          </p:nvPr>
+        </p:nvSpPr>
+        <p:spPr/>
+        <p:txBody>
+          <a:bodyPr/>
+          <a:lstStyle/>
+          <a:p>
+            <a:r>
+              <a:rPr lang="ko-KR" altLang="en-US" dirty="0"/>
+              <a:t>분할 정복</a:t>
+            </a:r>
+          </a:p>
+        </p:txBody>
+      </p:sp>
+      <mc:AlternateContent xmlns:mc="http://schemas.openxmlformats.org/markup-compatibility/2006" xmlns:a14="http://schemas.microsoft.com/office/drawing/2010/main">
+        <mc:Choice Requires="a14">
+          <p:sp>
+            <p:nvSpPr>
+              <p:cNvPr id="3" name="내용 개체 틀 2">
+                <a:extLst>
+                  <a:ext uri="{FF2B5EF4-FFF2-40B4-BE49-F238E27FC236}">
+                    <a16:creationId xmlns:a16="http://schemas.microsoft.com/office/drawing/2014/main" id="{66E13DB2-3E0F-2036-D1CB-ACB22B2E09B8}"/>
+                  </a:ext>
+                </a:extLst>
+              </p:cNvPr>
+              <p:cNvSpPr>
+                <a:spLocks noGrp="1"/>
+              </p:cNvSpPr>
+              <p:nvPr>
+                <p:ph idx="1"/>
+              </p:nvPr>
+            </p:nvSpPr>
+            <p:spPr/>
+            <p:txBody>
+              <a:bodyPr>
+                <a:normAutofit fontScale="92500" lnSpcReduction="20000"/>
+              </a:bodyPr>
+              <a:lstStyle/>
+              <a:p>
+                <a:pPr>
+                  <a:lnSpc>
+                    <a:spcPct val="150000"/>
+                  </a:lnSpc>
+                </a:pPr>
+                <a:r>
+                  <a:rPr lang="ko-KR" altLang="en-US" dirty="0"/>
+                  <a:t>예시</a:t>
+                </a:r>
+                <a:r>
+                  <a:rPr lang="en-US" altLang="ko-KR" dirty="0"/>
+                  <a:t>: </a:t>
+                </a:r>
+                <a14:m>
+                  <m:oMath xmlns:m="http://schemas.openxmlformats.org/officeDocument/2006/math">
+                    <m:sSup>
+                      <m:sSupPr>
+                        <m:ctrlPr>
+                          <a:rPr lang="en-US" altLang="ko-KR" i="1" smtClean="0">
+                            <a:latin typeface="Cambria Math" panose="02040503050406030204" pitchFamily="18" charset="0"/>
+                          </a:rPr>
+                        </m:ctrlPr>
+                      </m:sSupPr>
+                      <m:e>
+                        <m:r>
+                          <a:rPr lang="en-US" altLang="ko-KR" b="0" i="1" smtClean="0">
+                            <a:latin typeface="Cambria Math" panose="02040503050406030204" pitchFamily="18" charset="0"/>
+                          </a:rPr>
+                          <m:t>𝑎</m:t>
+                        </m:r>
+                      </m:e>
+                      <m:sup>
+                        <m:r>
+                          <a:rPr lang="en-US" altLang="ko-KR" b="0" i="1" smtClean="0">
+                            <a:latin typeface="Cambria Math" panose="02040503050406030204" pitchFamily="18" charset="0"/>
+                          </a:rPr>
+                          <m:t>𝑏</m:t>
+                        </m:r>
+                      </m:sup>
+                    </m:sSup>
+                    <m:r>
+                      <a:rPr lang="en-US" altLang="ko-KR" b="0" i="1" smtClean="0">
+                        <a:latin typeface="Cambria Math" panose="02040503050406030204" pitchFamily="18" charset="0"/>
+                      </a:rPr>
+                      <m:t> </m:t>
+                    </m:r>
+                    <m:r>
+                      <a:rPr lang="en-US" altLang="ko-KR" i="1">
+                        <a:latin typeface="Cambria Math" panose="02040503050406030204" pitchFamily="18" charset="0"/>
+                      </a:rPr>
+                      <m:t>𝑚𝑜𝑑</m:t>
+                    </m:r>
+                    <m:r>
+                      <a:rPr lang="en-US" altLang="ko-KR" i="1">
+                        <a:latin typeface="Cambria Math" panose="02040503050406030204" pitchFamily="18" charset="0"/>
+                      </a:rPr>
+                      <m:t> </m:t>
+                    </m:r>
+                    <m:r>
+                      <a:rPr lang="en-US" altLang="ko-KR" i="1" smtClean="0">
+                        <a:latin typeface="Cambria Math" panose="02040503050406030204" pitchFamily="18" charset="0"/>
+                      </a:rPr>
+                      <m:t>𝑐</m:t>
+                    </m:r>
+                  </m:oMath>
+                </a14:m>
+                <a:r>
+                  <a:rPr lang="en-US" altLang="ko-KR" dirty="0"/>
+                  <a:t> </a:t>
+                </a:r>
+                <a:r>
+                  <a:rPr lang="ko-KR" altLang="en-US" dirty="0"/>
+                  <a:t>빠르게 계산하기</a:t>
+                </a:r>
+                <a:endParaRPr lang="en-US" altLang="ko-KR" dirty="0"/>
+              </a:p>
+              <a:p>
+                <a:pPr>
+                  <a:lnSpc>
+                    <a:spcPct val="150000"/>
+                  </a:lnSpc>
+                </a:pPr>
+                <a14:m>
+                  <m:oMath xmlns:m="http://schemas.openxmlformats.org/officeDocument/2006/math">
+                    <m:d>
+                      <m:dPr>
+                        <m:begChr m:val="{"/>
+                        <m:endChr m:val="}"/>
+                        <m:ctrlPr>
+                          <a:rPr lang="en-US" altLang="ko-KR" b="0" i="1" smtClean="0">
+                            <a:latin typeface="Cambria Math" panose="02040503050406030204" pitchFamily="18" charset="0"/>
+                          </a:rPr>
+                        </m:ctrlPr>
+                      </m:dPr>
+                      <m:e>
+                        <m:d>
+                          <m:dPr>
+                            <m:ctrlPr>
+                              <a:rPr lang="en-US" altLang="ko-KR" b="0" i="1" smtClean="0">
+                                <a:latin typeface="Cambria Math" panose="02040503050406030204" pitchFamily="18" charset="0"/>
+                              </a:rPr>
+                            </m:ctrlPr>
+                          </m:dPr>
+                          <m:e>
+                            <m:r>
+                              <a:rPr lang="en-US" altLang="ko-KR" b="0" i="1" smtClean="0">
+                                <a:latin typeface="Cambria Math" panose="02040503050406030204" pitchFamily="18" charset="0"/>
+                              </a:rPr>
+                              <m:t>𝑎</m:t>
+                            </m:r>
+                            <m:r>
+                              <a:rPr lang="en-US" altLang="ko-KR" b="0" i="1" smtClean="0">
+                                <a:latin typeface="Cambria Math" panose="02040503050406030204" pitchFamily="18" charset="0"/>
+                              </a:rPr>
+                              <m:t> </m:t>
+                            </m:r>
+                            <m:r>
+                              <a:rPr lang="en-US" altLang="ko-KR" b="0" i="1" smtClean="0">
+                                <a:latin typeface="Cambria Math" panose="02040503050406030204" pitchFamily="18" charset="0"/>
+                              </a:rPr>
+                              <m:t>𝑚𝑜𝑑</m:t>
+                            </m:r>
+                            <m:r>
+                              <a:rPr lang="en-US" altLang="ko-KR" b="0" i="1" smtClean="0">
+                                <a:latin typeface="Cambria Math" panose="02040503050406030204" pitchFamily="18" charset="0"/>
+                              </a:rPr>
+                              <m:t> </m:t>
+                            </m:r>
+                            <m:r>
+                              <a:rPr lang="en-US" altLang="ko-KR" b="0" i="1" smtClean="0">
+                                <a:latin typeface="Cambria Math" panose="02040503050406030204" pitchFamily="18" charset="0"/>
+                              </a:rPr>
+                              <m:t>𝑒</m:t>
+                            </m:r>
+                          </m:e>
+                        </m:d>
+                        <m:r>
+                          <a:rPr lang="en-US" altLang="ko-KR" b="0" i="1" smtClean="0">
+                            <a:latin typeface="Cambria Math" panose="02040503050406030204" pitchFamily="18" charset="0"/>
+                          </a:rPr>
+                          <m:t> ∗</m:t>
+                        </m:r>
+                        <m:d>
+                          <m:dPr>
+                            <m:ctrlPr>
+                              <a:rPr lang="en-US" altLang="ko-KR" b="0" i="1" smtClean="0">
+                                <a:latin typeface="Cambria Math" panose="02040503050406030204" pitchFamily="18" charset="0"/>
+                              </a:rPr>
+                            </m:ctrlPr>
+                          </m:dPr>
+                          <m:e>
+                            <m:r>
+                              <a:rPr lang="en-US" altLang="ko-KR" b="0" i="1" smtClean="0">
+                                <a:latin typeface="Cambria Math" panose="02040503050406030204" pitchFamily="18" charset="0"/>
+                              </a:rPr>
+                              <m:t>𝑎</m:t>
+                            </m:r>
+                            <m:r>
+                              <a:rPr lang="en-US" altLang="ko-KR" b="0" i="1" smtClean="0">
+                                <a:latin typeface="Cambria Math" panose="02040503050406030204" pitchFamily="18" charset="0"/>
+                              </a:rPr>
+                              <m:t> </m:t>
+                            </m:r>
+                            <m:r>
+                              <a:rPr lang="en-US" altLang="ko-KR" b="0" i="1" smtClean="0">
+                                <a:latin typeface="Cambria Math" panose="02040503050406030204" pitchFamily="18" charset="0"/>
+                              </a:rPr>
+                              <m:t>𝑚𝑜𝑑</m:t>
+                            </m:r>
+                            <m:r>
+                              <a:rPr lang="en-US" altLang="ko-KR" b="0" i="1" smtClean="0">
+                                <a:latin typeface="Cambria Math" panose="02040503050406030204" pitchFamily="18" charset="0"/>
+                              </a:rPr>
+                              <m:t> </m:t>
+                            </m:r>
+                            <m:r>
+                              <a:rPr lang="en-US" altLang="ko-KR" b="0" i="1" smtClean="0">
+                                <a:latin typeface="Cambria Math" panose="02040503050406030204" pitchFamily="18" charset="0"/>
+                              </a:rPr>
+                              <m:t>𝑒</m:t>
+                            </m:r>
+                          </m:e>
+                        </m:d>
+                      </m:e>
+                    </m:d>
+                    <m:r>
+                      <a:rPr lang="en-US" altLang="ko-KR" b="0" i="1" smtClean="0">
+                        <a:latin typeface="Cambria Math" panose="02040503050406030204" pitchFamily="18" charset="0"/>
+                      </a:rPr>
+                      <m:t> </m:t>
+                    </m:r>
+                    <m:r>
+                      <a:rPr lang="en-US" altLang="ko-KR" b="0" i="1" smtClean="0">
+                        <a:latin typeface="Cambria Math" panose="02040503050406030204" pitchFamily="18" charset="0"/>
+                      </a:rPr>
+                      <m:t>𝑚𝑜𝑑</m:t>
+                    </m:r>
+                    <m:r>
+                      <a:rPr lang="en-US" altLang="ko-KR" b="0" i="1" smtClean="0">
+                        <a:latin typeface="Cambria Math" panose="02040503050406030204" pitchFamily="18" charset="0"/>
+                      </a:rPr>
+                      <m:t> </m:t>
+                    </m:r>
+                    <m:r>
+                      <a:rPr lang="en-US" altLang="ko-KR" b="0" i="1" smtClean="0">
+                        <a:latin typeface="Cambria Math" panose="02040503050406030204" pitchFamily="18" charset="0"/>
+                      </a:rPr>
+                      <m:t>𝑒</m:t>
+                    </m:r>
+                    <m:r>
+                      <a:rPr lang="en-US" altLang="ko-KR" b="0" i="1" smtClean="0">
+                        <a:latin typeface="Cambria Math" panose="02040503050406030204" pitchFamily="18" charset="0"/>
+                      </a:rPr>
+                      <m:t>=</m:t>
+                    </m:r>
+                    <m:d>
+                      <m:dPr>
+                        <m:ctrlPr>
+                          <a:rPr lang="en-US" altLang="ko-KR" b="0" i="1" smtClean="0">
+                            <a:latin typeface="Cambria Math" panose="02040503050406030204" pitchFamily="18" charset="0"/>
+                          </a:rPr>
+                        </m:ctrlPr>
+                      </m:dPr>
+                      <m:e>
+                        <m:r>
+                          <a:rPr lang="en-US" altLang="ko-KR" b="0" i="1" smtClean="0">
+                            <a:latin typeface="Cambria Math" panose="02040503050406030204" pitchFamily="18" charset="0"/>
+                          </a:rPr>
+                          <m:t>𝑎</m:t>
+                        </m:r>
+                        <m:r>
+                          <a:rPr lang="en-US" altLang="ko-KR" b="0" i="1" smtClean="0">
+                            <a:latin typeface="Cambria Math" panose="02040503050406030204" pitchFamily="18" charset="0"/>
+                          </a:rPr>
+                          <m:t>∗</m:t>
+                        </m:r>
+                        <m:r>
+                          <a:rPr lang="en-US" altLang="ko-KR" b="0" i="1" smtClean="0">
+                            <a:latin typeface="Cambria Math" panose="02040503050406030204" pitchFamily="18" charset="0"/>
+                          </a:rPr>
+                          <m:t>𝑏</m:t>
+                        </m:r>
+                      </m:e>
+                    </m:d>
+                    <m:r>
+                      <a:rPr lang="en-US" altLang="ko-KR" b="0" i="1" smtClean="0">
+                        <a:latin typeface="Cambria Math" panose="02040503050406030204" pitchFamily="18" charset="0"/>
+                      </a:rPr>
+                      <m:t> </m:t>
+                    </m:r>
+                    <m:r>
+                      <a:rPr lang="en-US" altLang="ko-KR" b="0" i="1" smtClean="0">
+                        <a:latin typeface="Cambria Math" panose="02040503050406030204" pitchFamily="18" charset="0"/>
+                      </a:rPr>
+                      <m:t>𝑚𝑜𝑑</m:t>
+                    </m:r>
+                    <m:r>
+                      <a:rPr lang="en-US" altLang="ko-KR" b="0" i="1" smtClean="0">
+                        <a:latin typeface="Cambria Math" panose="02040503050406030204" pitchFamily="18" charset="0"/>
+                      </a:rPr>
+                      <m:t> </m:t>
+                    </m:r>
+                    <m:r>
+                      <a:rPr lang="en-US" altLang="ko-KR" b="0" i="1" smtClean="0">
+                        <a:latin typeface="Cambria Math" panose="02040503050406030204" pitchFamily="18" charset="0"/>
+                      </a:rPr>
+                      <m:t>𝑒</m:t>
+                    </m:r>
+                  </m:oMath>
+                </a14:m>
+                <a:r>
+                  <a:rPr lang="en-US" altLang="ko-KR" dirty="0"/>
+                  <a:t> </a:t>
+                </a:r>
+              </a:p>
+              <a:p>
+                <a:pPr lvl="1">
+                  <a:lnSpc>
+                    <a:spcPct val="150000"/>
+                  </a:lnSpc>
+                </a:pPr>
+                <a14:m>
+                  <m:oMath xmlns:m="http://schemas.openxmlformats.org/officeDocument/2006/math">
+                    <m:r>
+                      <m:rPr>
+                        <m:sty m:val="p"/>
+                      </m:rPr>
+                      <a:rPr lang="en-US" altLang="ko-KR" b="0" i="1" smtClean="0">
+                        <a:latin typeface="Cambria Math" panose="02040503050406030204" pitchFamily="18" charset="0"/>
+                      </a:rPr>
+                      <m:t>b</m:t>
+                    </m:r>
+                    <m:r>
+                      <a:rPr lang="en-US" altLang="ko-KR" b="0" i="1" smtClean="0">
+                        <a:latin typeface="Cambria Math" panose="02040503050406030204" pitchFamily="18" charset="0"/>
+                      </a:rPr>
+                      <m:t>=0</m:t>
+                    </m:r>
+                  </m:oMath>
+                </a14:m>
+                <a:r>
+                  <a:rPr lang="ko-KR" altLang="en-US" dirty="0"/>
+                  <a:t>이면 충분히 작기에 직접 해결한다</a:t>
+                </a:r>
+                <a:r>
+                  <a:rPr lang="en-US" altLang="ko-KR" dirty="0"/>
+                  <a:t>. (base case : </a:t>
+                </a:r>
+                <a14:m>
+                  <m:oMath xmlns:m="http://schemas.openxmlformats.org/officeDocument/2006/math">
+                    <m:sSup>
+                      <m:sSupPr>
+                        <m:ctrlPr>
+                          <a:rPr lang="en-US" altLang="ko-KR" b="0" i="1" smtClean="0">
+                            <a:latin typeface="Cambria Math" panose="02040503050406030204" pitchFamily="18" charset="0"/>
+                          </a:rPr>
+                        </m:ctrlPr>
+                      </m:sSupPr>
+                      <m:e>
+                        <m:r>
+                          <a:rPr lang="en-US" altLang="ko-KR" b="0" i="1" smtClean="0">
+                            <a:latin typeface="Cambria Math" panose="02040503050406030204" pitchFamily="18" charset="0"/>
+                          </a:rPr>
+                          <m:t>𝑎</m:t>
+                        </m:r>
+                      </m:e>
+                      <m:sup>
+                        <m:r>
+                          <a:rPr lang="en-US" altLang="ko-KR" b="0" i="1" smtClean="0">
+                            <a:latin typeface="Cambria Math" panose="02040503050406030204" pitchFamily="18" charset="0"/>
+                          </a:rPr>
+                          <m:t>0</m:t>
+                        </m:r>
+                      </m:sup>
+                    </m:sSup>
+                    <m:r>
+                      <a:rPr lang="en-US" altLang="ko-KR" b="0" i="1" smtClean="0">
+                        <a:latin typeface="Cambria Math" panose="02040503050406030204" pitchFamily="18" charset="0"/>
+                      </a:rPr>
+                      <m:t>=1</m:t>
+                    </m:r>
+                  </m:oMath>
+                </a14:m>
+                <a:r>
+                  <a:rPr lang="en-US" altLang="ko-KR" dirty="0"/>
+                  <a:t>)</a:t>
+                </a:r>
+              </a:p>
+              <a:p>
+                <a:pPr lvl="1">
+                  <a:lnSpc>
+                    <a:spcPct val="150000"/>
+                  </a:lnSpc>
+                </a:pPr>
+                <a14:m>
+                  <m:oMath xmlns:m="http://schemas.openxmlformats.org/officeDocument/2006/math">
+                    <m:r>
+                      <m:rPr>
+                        <m:sty m:val="p"/>
+                      </m:rPr>
+                      <a:rPr lang="en-US" altLang="ko-KR" b="0" i="1" smtClean="0">
+                        <a:latin typeface="Cambria Math" panose="02040503050406030204" pitchFamily="18" charset="0"/>
+                      </a:rPr>
+                      <m:t>b</m:t>
+                    </m:r>
+                    <m:r>
+                      <a:rPr lang="en-US" altLang="ko-KR" b="0" i="1" smtClean="0">
+                        <a:latin typeface="Cambria Math" panose="02040503050406030204" pitchFamily="18" charset="0"/>
+                      </a:rPr>
+                      <m:t>≥1</m:t>
+                    </m:r>
+                    <m:r>
+                      <a:rPr lang="ko-KR" altLang="en-US" i="1">
+                        <a:latin typeface="Cambria Math" panose="02040503050406030204" pitchFamily="18" charset="0"/>
+                      </a:rPr>
+                      <m:t>이</m:t>
+                    </m:r>
+                  </m:oMath>
+                </a14:m>
+                <a:r>
+                  <a:rPr lang="ko-KR" altLang="en-US" dirty="0"/>
+                  <a:t>면 더 작은 문제로 나눠 해결한다</a:t>
+                </a:r>
+                <a:r>
+                  <a:rPr lang="en-US" altLang="ko-KR" dirty="0"/>
+                  <a:t>.</a:t>
+                </a:r>
+              </a:p>
+              <a:p>
+                <a:pPr lvl="2">
+                  <a:lnSpc>
+                    <a:spcPct val="150000"/>
+                  </a:lnSpc>
+                </a:pPr>
+                <a:r>
+                  <a:rPr lang="en-US" altLang="ko-KR" dirty="0"/>
+                  <a:t>B</a:t>
+                </a:r>
+                <a:r>
+                  <a:rPr lang="ko-KR" altLang="en-US" dirty="0"/>
+                  <a:t>가 짝수면 </a:t>
+                </a:r>
+                <a14:m>
+                  <m:oMath xmlns:m="http://schemas.openxmlformats.org/officeDocument/2006/math">
+                    <m:sSup>
+                      <m:sSupPr>
+                        <m:ctrlPr>
+                          <a:rPr lang="en-US" altLang="ko-KR" b="0" i="1" smtClean="0">
+                            <a:latin typeface="Cambria Math" panose="02040503050406030204" pitchFamily="18" charset="0"/>
+                          </a:rPr>
+                        </m:ctrlPr>
+                      </m:sSupPr>
+                      <m:e>
+                        <m:r>
+                          <a:rPr lang="en-US" altLang="ko-KR" b="0" i="1" smtClean="0">
+                            <a:latin typeface="Cambria Math" panose="02040503050406030204" pitchFamily="18" charset="0"/>
+                          </a:rPr>
+                          <m:t>𝑎</m:t>
+                        </m:r>
+                      </m:e>
+                      <m:sup>
+                        <m:r>
+                          <a:rPr lang="en-US" altLang="ko-KR" b="0" i="1" smtClean="0">
+                            <a:latin typeface="Cambria Math" panose="02040503050406030204" pitchFamily="18" charset="0"/>
+                          </a:rPr>
+                          <m:t>𝑏</m:t>
+                        </m:r>
+                        <m:r>
+                          <a:rPr lang="en-US" altLang="ko-KR" b="0" i="1" smtClean="0">
+                            <a:latin typeface="Cambria Math" panose="02040503050406030204" pitchFamily="18" charset="0"/>
+                          </a:rPr>
+                          <m:t>/2</m:t>
+                        </m:r>
+                      </m:sup>
+                    </m:sSup>
+                    <m:r>
+                      <a:rPr lang="en-US" altLang="ko-KR" b="0" i="1" smtClean="0">
+                        <a:latin typeface="Cambria Math" panose="02040503050406030204" pitchFamily="18" charset="0"/>
+                      </a:rPr>
+                      <m:t> </m:t>
+                    </m:r>
+                    <m:r>
+                      <a:rPr lang="en-US" altLang="ko-KR" b="0" i="1" smtClean="0">
+                        <a:latin typeface="Cambria Math" panose="02040503050406030204" pitchFamily="18" charset="0"/>
+                        <a:ea typeface="Cambria Math" panose="02040503050406030204" pitchFamily="18" charset="0"/>
+                      </a:rPr>
+                      <m:t>×</m:t>
+                    </m:r>
+                    <m:sSup>
+                      <m:sSupPr>
+                        <m:ctrlPr>
+                          <a:rPr lang="en-US" altLang="ko-KR" i="1">
+                            <a:latin typeface="Cambria Math" panose="02040503050406030204" pitchFamily="18" charset="0"/>
+                          </a:rPr>
+                        </m:ctrlPr>
+                      </m:sSupPr>
+                      <m:e>
+                        <m:r>
+                          <a:rPr lang="en-US" altLang="ko-KR" i="1">
+                            <a:latin typeface="Cambria Math" panose="02040503050406030204" pitchFamily="18" charset="0"/>
+                          </a:rPr>
+                          <m:t>𝑎</m:t>
+                        </m:r>
+                      </m:e>
+                      <m:sup>
+                        <m:r>
+                          <a:rPr lang="en-US" altLang="ko-KR" i="1">
+                            <a:latin typeface="Cambria Math" panose="02040503050406030204" pitchFamily="18" charset="0"/>
+                          </a:rPr>
+                          <m:t>𝑏</m:t>
+                        </m:r>
+                        <m:r>
+                          <a:rPr lang="en-US" altLang="ko-KR" b="0" i="1" smtClean="0">
+                            <a:latin typeface="Cambria Math" panose="02040503050406030204" pitchFamily="18" charset="0"/>
+                          </a:rPr>
+                          <m:t>/2</m:t>
+                        </m:r>
+                      </m:sup>
+                    </m:sSup>
+                    <m:r>
+                      <a:rPr lang="en-US" altLang="ko-KR" b="0" i="1" smtClean="0">
+                        <a:latin typeface="Cambria Math" panose="02040503050406030204" pitchFamily="18" charset="0"/>
+                      </a:rPr>
+                      <m:t> </m:t>
+                    </m:r>
+                    <m:d>
+                      <m:dPr>
+                        <m:ctrlPr>
+                          <a:rPr lang="en-US" altLang="ko-KR" b="0" i="1" smtClean="0">
+                            <a:latin typeface="Cambria Math" panose="02040503050406030204" pitchFamily="18" charset="0"/>
+                          </a:rPr>
+                        </m:ctrlPr>
+                      </m:dPr>
+                      <m:e>
+                        <m:r>
+                          <a:rPr lang="en-US" altLang="ko-KR" b="0" i="1" smtClean="0">
+                            <a:latin typeface="Cambria Math" panose="02040503050406030204" pitchFamily="18" charset="0"/>
+                          </a:rPr>
+                          <m:t>𝑚𝑜𝑑</m:t>
+                        </m:r>
+                        <m:r>
+                          <a:rPr lang="en-US" altLang="ko-KR" b="0" i="1" smtClean="0">
+                            <a:latin typeface="Cambria Math" panose="02040503050406030204" pitchFamily="18" charset="0"/>
+                          </a:rPr>
+                          <m:t> </m:t>
+                        </m:r>
+                        <m:r>
+                          <a:rPr lang="en-US" altLang="ko-KR" b="0" i="1" smtClean="0">
+                            <a:latin typeface="Cambria Math" panose="02040503050406030204" pitchFamily="18" charset="0"/>
+                          </a:rPr>
+                          <m:t>𝑐</m:t>
+                        </m:r>
+                      </m:e>
+                    </m:d>
+                  </m:oMath>
+                </a14:m>
+                <a:endParaRPr lang="en-US" altLang="ko-KR" i="1" dirty="0">
+                  <a:latin typeface="Cambria Math" panose="02040503050406030204" pitchFamily="18" charset="0"/>
+                </a:endParaRPr>
+              </a:p>
+              <a:p>
+                <a:pPr lvl="2">
+                  <a:lnSpc>
+                    <a:spcPct val="150000"/>
+                  </a:lnSpc>
+                </a:pPr>
+                <a14:m>
+                  <m:oMath xmlns:m="http://schemas.openxmlformats.org/officeDocument/2006/math">
+                    <m:r>
+                      <m:rPr>
+                        <m:nor/>
+                      </m:rPr>
+                      <a:rPr lang="en-US" altLang="ko-KR" dirty="0"/>
+                      <m:t>B</m:t>
+                    </m:r>
+                    <m:r>
+                      <m:rPr>
+                        <m:nor/>
+                      </m:rPr>
+                      <a:rPr lang="ko-KR" altLang="en-US" dirty="0"/>
+                      <m:t>가 </m:t>
+                    </m:r>
+                    <m:r>
+                      <a:rPr lang="ko-KR" altLang="en-US" i="1" dirty="0" smtClean="0">
+                        <a:latin typeface="Cambria Math" panose="02040503050406030204" pitchFamily="18" charset="0"/>
+                      </a:rPr>
+                      <m:t>홀</m:t>
+                    </m:r>
+                    <m:r>
+                      <m:rPr>
+                        <m:nor/>
+                      </m:rPr>
+                      <a:rPr lang="ko-KR" altLang="en-US" dirty="0"/>
+                      <m:t>수면 </m:t>
+                    </m:r>
+                    <m:sSup>
+                      <m:sSupPr>
+                        <m:ctrlPr>
+                          <a:rPr lang="en-US" altLang="ko-KR" i="1">
+                            <a:latin typeface="Cambria Math" panose="02040503050406030204" pitchFamily="18" charset="0"/>
+                          </a:rPr>
+                        </m:ctrlPr>
+                      </m:sSupPr>
+                      <m:e>
+                        <m:r>
+                          <a:rPr lang="en-US" altLang="ko-KR" i="1">
+                            <a:latin typeface="Cambria Math" panose="02040503050406030204" pitchFamily="18" charset="0"/>
+                          </a:rPr>
+                          <m:t>𝑎</m:t>
+                        </m:r>
+                      </m:e>
+                      <m:sup>
+                        <m:r>
+                          <a:rPr lang="en-US" altLang="ko-KR" b="0" i="1" smtClean="0">
+                            <a:latin typeface="Cambria Math" panose="02040503050406030204" pitchFamily="18" charset="0"/>
+                          </a:rPr>
+                          <m:t>(</m:t>
+                        </m:r>
+                        <m:r>
+                          <a:rPr lang="en-US" altLang="ko-KR" i="1">
+                            <a:latin typeface="Cambria Math" panose="02040503050406030204" pitchFamily="18" charset="0"/>
+                          </a:rPr>
+                          <m:t>𝑏</m:t>
+                        </m:r>
+                        <m:r>
+                          <a:rPr lang="en-US" altLang="ko-KR" b="0" i="1" smtClean="0">
+                            <a:latin typeface="Cambria Math" panose="02040503050406030204" pitchFamily="18" charset="0"/>
+                          </a:rPr>
+                          <m:t>−1)</m:t>
+                        </m:r>
+                        <m:r>
+                          <a:rPr lang="en-US" altLang="ko-KR" i="1">
+                            <a:latin typeface="Cambria Math" panose="02040503050406030204" pitchFamily="18" charset="0"/>
+                          </a:rPr>
+                          <m:t>/2</m:t>
+                        </m:r>
+                      </m:sup>
+                    </m:sSup>
+                    <m:r>
+                      <a:rPr lang="en-US" altLang="ko-KR" i="1">
+                        <a:latin typeface="Cambria Math" panose="02040503050406030204" pitchFamily="18" charset="0"/>
+                      </a:rPr>
+                      <m:t> </m:t>
+                    </m:r>
+                    <m:r>
+                      <a:rPr lang="en-US" altLang="ko-KR" i="1">
+                        <a:latin typeface="Cambria Math" panose="02040503050406030204" pitchFamily="18" charset="0"/>
+                        <a:ea typeface="Cambria Math" panose="02040503050406030204" pitchFamily="18" charset="0"/>
+                      </a:rPr>
+                      <m:t>×</m:t>
+                    </m:r>
+                    <m:sSup>
+                      <m:sSupPr>
+                        <m:ctrlPr>
+                          <a:rPr lang="en-US" altLang="ko-KR" i="1">
+                            <a:latin typeface="Cambria Math" panose="02040503050406030204" pitchFamily="18" charset="0"/>
+                          </a:rPr>
+                        </m:ctrlPr>
+                      </m:sSupPr>
+                      <m:e>
+                        <m:r>
+                          <a:rPr lang="en-US" altLang="ko-KR" i="1">
+                            <a:latin typeface="Cambria Math" panose="02040503050406030204" pitchFamily="18" charset="0"/>
+                          </a:rPr>
+                          <m:t>𝑎</m:t>
+                        </m:r>
+                      </m:e>
+                      <m:sup>
+                        <m:r>
+                          <a:rPr lang="en-US" altLang="ko-KR" i="1">
+                            <a:latin typeface="Cambria Math" panose="02040503050406030204" pitchFamily="18" charset="0"/>
+                          </a:rPr>
+                          <m:t>(</m:t>
+                        </m:r>
+                        <m:r>
+                          <a:rPr lang="en-US" altLang="ko-KR" i="1">
+                            <a:latin typeface="Cambria Math" panose="02040503050406030204" pitchFamily="18" charset="0"/>
+                          </a:rPr>
+                          <m:t>𝑏</m:t>
+                        </m:r>
+                        <m:r>
+                          <a:rPr lang="en-US" altLang="ko-KR" b="0" i="1" smtClean="0">
+                            <a:latin typeface="Cambria Math" panose="02040503050406030204" pitchFamily="18" charset="0"/>
+                          </a:rPr>
+                          <m:t>−</m:t>
+                        </m:r>
+                        <m:r>
+                          <a:rPr lang="en-US" altLang="ko-KR" i="1">
+                            <a:latin typeface="Cambria Math" panose="02040503050406030204" pitchFamily="18" charset="0"/>
+                          </a:rPr>
+                          <m:t>1)/2</m:t>
+                        </m:r>
+                      </m:sup>
+                    </m:sSup>
+                    <m:r>
+                      <a:rPr lang="en-US" altLang="ko-KR" i="1">
+                        <a:latin typeface="Cambria Math" panose="02040503050406030204" pitchFamily="18" charset="0"/>
+                        <a:ea typeface="Cambria Math" panose="02040503050406030204" pitchFamily="18" charset="0"/>
+                      </a:rPr>
+                      <m:t>×</m:t>
+                    </m:r>
+                    <m:r>
+                      <a:rPr lang="en-US" altLang="ko-KR" b="0" i="1" smtClean="0">
+                        <a:latin typeface="Cambria Math" panose="02040503050406030204" pitchFamily="18" charset="0"/>
+                        <a:ea typeface="Cambria Math" panose="02040503050406030204" pitchFamily="18" charset="0"/>
+                      </a:rPr>
+                      <m:t>𝑎</m:t>
+                    </m:r>
+                    <m:r>
+                      <a:rPr lang="en-US" altLang="ko-KR" b="0" i="1" smtClean="0">
+                        <a:latin typeface="Cambria Math" panose="02040503050406030204" pitchFamily="18" charset="0"/>
+                        <a:ea typeface="Cambria Math" panose="02040503050406030204" pitchFamily="18" charset="0"/>
+                      </a:rPr>
+                      <m:t> </m:t>
+                    </m:r>
+                    <m:d>
+                      <m:dPr>
+                        <m:ctrlPr>
+                          <a:rPr lang="en-US" altLang="ko-KR" i="1">
+                            <a:latin typeface="Cambria Math" panose="02040503050406030204" pitchFamily="18" charset="0"/>
+                          </a:rPr>
+                        </m:ctrlPr>
+                      </m:dPr>
+                      <m:e>
+                        <m:r>
+                          <a:rPr lang="en-US" altLang="ko-KR" i="1">
+                            <a:latin typeface="Cambria Math" panose="02040503050406030204" pitchFamily="18" charset="0"/>
+                          </a:rPr>
+                          <m:t>𝑚𝑜𝑑</m:t>
+                        </m:r>
+                        <m:r>
+                          <a:rPr lang="en-US" altLang="ko-KR" i="1">
+                            <a:latin typeface="Cambria Math" panose="02040503050406030204" pitchFamily="18" charset="0"/>
+                          </a:rPr>
+                          <m:t> </m:t>
+                        </m:r>
+                        <m:r>
+                          <a:rPr lang="en-US" altLang="ko-KR" i="1">
+                            <a:latin typeface="Cambria Math" panose="02040503050406030204" pitchFamily="18" charset="0"/>
+                          </a:rPr>
+                          <m:t>𝑐</m:t>
+                        </m:r>
+                      </m:e>
+                    </m:d>
+                  </m:oMath>
+                </a14:m>
+                <a:endParaRPr lang="en-US" altLang="ko-KR" dirty="0"/>
+              </a:p>
+              <a:p>
+                <a:pPr lvl="1">
+                  <a:lnSpc>
+                    <a:spcPct val="150000"/>
+                  </a:lnSpc>
+                </a:pPr>
+                <a:r>
+                  <a:rPr lang="ko-KR" altLang="en-US" dirty="0"/>
+                  <a:t>시간 복잡도</a:t>
+                </a:r>
+                <a:endParaRPr lang="en-US" altLang="ko-KR" dirty="0"/>
+              </a:p>
+              <a:p>
+                <a:pPr lvl="2">
+                  <a:lnSpc>
+                    <a:spcPct val="150000"/>
+                  </a:lnSpc>
+                </a:pPr>
+                <a:r>
+                  <a:rPr lang="en-US" altLang="ko-KR" dirty="0"/>
+                  <a:t>b</a:t>
+                </a:r>
+                <a:r>
+                  <a:rPr lang="ko-KR" altLang="en-US" dirty="0"/>
+                  <a:t>의 최상위 비트까지 내려가니 </a:t>
+                </a:r>
+                <a14:m>
+                  <m:oMath xmlns:m="http://schemas.openxmlformats.org/officeDocument/2006/math">
+                    <m:r>
+                      <a:rPr lang="en-US" altLang="ko-KR" i="1" dirty="0" smtClean="0">
+                        <a:latin typeface="Cambria Math" panose="02040503050406030204" pitchFamily="18" charset="0"/>
+                      </a:rPr>
+                      <m:t>𝑂</m:t>
+                    </m:r>
+                    <m:r>
+                      <a:rPr lang="en-US" altLang="ko-KR" i="1" dirty="0" smtClean="0">
+                        <a:latin typeface="Cambria Math" panose="02040503050406030204" pitchFamily="18" charset="0"/>
+                      </a:rPr>
+                      <m:t>(</m:t>
+                    </m:r>
+                    <m:func>
+                      <m:funcPr>
+                        <m:ctrlPr>
+                          <a:rPr lang="en-US" altLang="ko-KR" i="1" dirty="0" smtClean="0">
+                            <a:latin typeface="Cambria Math" panose="02040503050406030204" pitchFamily="18" charset="0"/>
+                          </a:rPr>
+                        </m:ctrlPr>
+                      </m:funcPr>
+                      <m:fName>
+                        <m:r>
+                          <m:rPr>
+                            <m:sty m:val="p"/>
+                          </m:rPr>
+                          <a:rPr lang="en-US" altLang="ko-KR" i="0" dirty="0" smtClean="0">
+                            <a:latin typeface="Cambria Math" panose="02040503050406030204" pitchFamily="18" charset="0"/>
+                          </a:rPr>
+                          <m:t>log</m:t>
+                        </m:r>
+                      </m:fName>
+                      <m:e>
+                        <m:r>
+                          <a:rPr lang="en-US" altLang="ko-KR" b="0" i="1" dirty="0" smtClean="0">
+                            <a:latin typeface="Cambria Math" panose="02040503050406030204" pitchFamily="18" charset="0"/>
+                          </a:rPr>
+                          <m:t>𝑏</m:t>
+                        </m:r>
+                      </m:e>
+                    </m:func>
+                    <m:r>
+                      <a:rPr lang="en-US" altLang="ko-KR" i="1" dirty="0">
+                        <a:latin typeface="Cambria Math" panose="02040503050406030204" pitchFamily="18" charset="0"/>
+                      </a:rPr>
+                      <m:t>)</m:t>
+                    </m:r>
+                  </m:oMath>
+                </a14:m>
+                <a:r>
+                  <a:rPr lang="en-US" altLang="ko-KR" dirty="0"/>
+                  <a:t> (</a:t>
+                </a:r>
+                <a14:m>
+                  <m:oMath xmlns:m="http://schemas.openxmlformats.org/officeDocument/2006/math">
+                    <m:func>
+                      <m:funcPr>
+                        <m:ctrlPr>
+                          <a:rPr lang="en-US" altLang="ko-KR" i="1" dirty="0" smtClean="0">
+                            <a:latin typeface="Cambria Math" panose="02040503050406030204" pitchFamily="18" charset="0"/>
+                          </a:rPr>
+                        </m:ctrlPr>
+                      </m:funcPr>
+                      <m:fName>
+                        <m:sSub>
+                          <m:sSubPr>
+                            <m:ctrlPr>
+                              <a:rPr lang="en-US" altLang="ko-KR" i="1" dirty="0" smtClean="0">
+                                <a:latin typeface="Cambria Math" panose="02040503050406030204" pitchFamily="18" charset="0"/>
+                              </a:rPr>
+                            </m:ctrlPr>
+                          </m:sSubPr>
+                          <m:e>
+                            <m:r>
+                              <m:rPr>
+                                <m:sty m:val="p"/>
+                              </m:rPr>
+                              <a:rPr lang="en-US" altLang="ko-KR" i="0" dirty="0" smtClean="0">
+                                <a:latin typeface="Cambria Math" panose="02040503050406030204" pitchFamily="18" charset="0"/>
+                              </a:rPr>
+                              <m:t>log</m:t>
+                            </m:r>
+                          </m:e>
+                          <m:sub>
+                            <m:r>
+                              <a:rPr lang="en-US" altLang="ko-KR" b="0" i="1" dirty="0" smtClean="0">
+                                <a:latin typeface="Cambria Math" panose="02040503050406030204" pitchFamily="18" charset="0"/>
+                              </a:rPr>
+                              <m:t>2</m:t>
+                            </m:r>
+                          </m:sub>
+                        </m:sSub>
+                      </m:fName>
+                      <m:e>
+                        <m:r>
+                          <a:rPr lang="en-US" altLang="ko-KR" b="0" i="1" dirty="0" smtClean="0">
+                            <a:latin typeface="Cambria Math" panose="02040503050406030204" pitchFamily="18" charset="0"/>
+                          </a:rPr>
+                          <m:t>𝑏</m:t>
+                        </m:r>
+                      </m:e>
+                    </m:func>
+                    <m:r>
+                      <a:rPr lang="ko-KR" altLang="en-US" i="1" dirty="0">
+                        <a:latin typeface="Cambria Math" panose="02040503050406030204" pitchFamily="18" charset="0"/>
+                      </a:rPr>
+                      <m:t>가</m:t>
+                    </m:r>
+                  </m:oMath>
+                </a14:m>
+                <a:r>
+                  <a:rPr lang="en-US" altLang="ko-KR" dirty="0"/>
+                  <a:t> </a:t>
+                </a:r>
+                <a:r>
+                  <a:rPr lang="ko-KR" altLang="en-US" dirty="0"/>
+                  <a:t>맞지만 대부분 </a:t>
+                </a:r>
+                <a14:m>
+                  <m:oMath xmlns:m="http://schemas.openxmlformats.org/officeDocument/2006/math">
+                    <m:func>
+                      <m:funcPr>
+                        <m:ctrlPr>
+                          <a:rPr lang="en-US" altLang="ko-KR" i="1" dirty="0">
+                            <a:latin typeface="Cambria Math" panose="02040503050406030204" pitchFamily="18" charset="0"/>
+                          </a:rPr>
+                        </m:ctrlPr>
+                      </m:funcPr>
+                      <m:fName>
+                        <m:r>
+                          <m:rPr>
+                            <m:sty m:val="p"/>
+                          </m:rPr>
+                          <a:rPr lang="en-US" altLang="ko-KR" dirty="0">
+                            <a:latin typeface="Cambria Math" panose="02040503050406030204" pitchFamily="18" charset="0"/>
+                          </a:rPr>
+                          <m:t>log</m:t>
+                        </m:r>
+                      </m:fName>
+                      <m:e>
+                        <m:r>
+                          <a:rPr lang="en-US" altLang="ko-KR" i="1" dirty="0">
+                            <a:latin typeface="Cambria Math" panose="02040503050406030204" pitchFamily="18" charset="0"/>
+                          </a:rPr>
+                          <m:t>𝑏</m:t>
+                        </m:r>
+                      </m:e>
+                    </m:func>
+                    <m:r>
+                      <a:rPr lang="ko-KR" altLang="en-US" i="1" dirty="0" smtClean="0">
+                        <a:latin typeface="Cambria Math" panose="02040503050406030204" pitchFamily="18" charset="0"/>
+                      </a:rPr>
+                      <m:t>으</m:t>
+                    </m:r>
+                  </m:oMath>
+                </a14:m>
+                <a:r>
+                  <a:rPr lang="ko-KR" altLang="en-US" dirty="0"/>
+                  <a:t>로 표현</a:t>
+                </a:r>
+                <a:r>
+                  <a:rPr lang="en-US" altLang="ko-KR" dirty="0"/>
+                  <a:t>)</a:t>
+                </a:r>
+              </a:p>
+            </p:txBody>
+          </p:sp>
+        </mc:Choice>
+        <mc:Fallback xmlns="">
+          <p:sp>
+            <p:nvSpPr>
+              <p:cNvPr id="3" name="내용 개체 틀 2">
+                <a:extLst>
+                  <a:ext uri="{FF2B5EF4-FFF2-40B4-BE49-F238E27FC236}">
+                    <a16:creationId xmlns:a16="http://schemas.microsoft.com/office/drawing/2014/main" id="{66E13DB2-3E0F-2036-D1CB-ACB22B2E09B8}"/>
+                  </a:ext>
+                </a:extLst>
+              </p:cNvPr>
+              <p:cNvSpPr>
+                <a:spLocks noGrp="1" noRot="1" noChangeAspect="1" noMove="1" noResize="1" noEditPoints="1" noAdjustHandles="1" noChangeArrowheads="1" noChangeShapeType="1" noTextEdit="1"/>
+              </p:cNvSpPr>
+              <p:nvPr>
+                <p:ph idx="1"/>
+              </p:nvPr>
+            </p:nvSpPr>
+            <p:spPr>
+              <a:blipFill>
+                <a:blip r:embed="rId2"/>
+                <a:stretch>
+                  <a:fillRect l="-928"/>
+                </a:stretch>
+              </a:blipFill>
+            </p:spPr>
+            <p:txBody>
+              <a:bodyPr/>
+              <a:lstStyle/>
+              <a:p>
+                <a:r>
+                  <a:rPr lang="ko-KR" altLang="en-US">
+                    <a:noFill/>
+                  </a:rPr>
+                  <a:t> </a:t>
+                </a:r>
+              </a:p>
+            </p:txBody>
+          </p:sp>
+        </mc:Fallback>
+      </mc:AlternateContent>
+    </p:spTree>
+    <p:extLst>
+      <p:ext uri="{BB962C8B-B14F-4D97-AF65-F5344CB8AC3E}">
+        <p14:creationId xmlns:p14="http://schemas.microsoft.com/office/powerpoint/2010/main" val="3936670376"/>
+      </p:ext>
+    </p:extLst>
+  </p:cSld>
+  <p:clrMapOvr>
+    <a:masterClrMapping/>
+  </p:clrMapOvr>
+</p:sld>
+</file>
+
+<file path=ppt/slides/slide12.xml><?xml version="1.0" encoding="utf-8"?>
+<p:sld xmlns:a="http://schemas.openxmlformats.org/drawingml/2006/main" xmlns:r="http://schemas.openxmlformats.org/officeDocument/2006/relationships" xmlns:p="http://schemas.openxmlformats.org/presentationml/2006/main">
+  <p:cSld>
+    <p:spTree>
+      <p:nvGrpSpPr>
+        <p:cNvPr id="1" name="">
+          <a:extLst>
+            <a:ext uri="{FF2B5EF4-FFF2-40B4-BE49-F238E27FC236}">
+              <a16:creationId xmlns:a16="http://schemas.microsoft.com/office/drawing/2014/main" id="{3A2DA3FA-6AB4-92E3-ABA2-B44F98549B99}"/>
+            </a:ext>
+          </a:extLst>
+        </p:cNvPr>
+        <p:cNvGrpSpPr/>
+        <p:nvPr/>
+      </p:nvGrpSpPr>
+      <p:grpSpPr>
+        <a:xfrm>
+          <a:off x="0" y="0"/>
+          <a:ext cx="0" cy="0"/>
+          <a:chOff x="0" y="0"/>
+          <a:chExt cx="0" cy="0"/>
+        </a:xfrm>
+      </p:grpSpPr>
+      <p:sp>
+        <p:nvSpPr>
+          <p:cNvPr id="2" name="제목 1">
+            <a:extLst>
+              <a:ext uri="{FF2B5EF4-FFF2-40B4-BE49-F238E27FC236}">
+                <a16:creationId xmlns:a16="http://schemas.microsoft.com/office/drawing/2014/main" id="{F4552EAB-D169-6B11-F5CA-76F07DDBDDBF}"/>
+              </a:ext>
+            </a:extLst>
+          </p:cNvPr>
+          <p:cNvSpPr>
+            <a:spLocks noGrp="1"/>
+          </p:cNvSpPr>
+          <p:nvPr>
+            <p:ph type="title"/>
+          </p:nvPr>
+        </p:nvSpPr>
+        <p:spPr/>
+        <p:txBody>
+          <a:bodyPr/>
+          <a:lstStyle/>
+          <a:p>
+            <a:r>
+              <a:rPr lang="ko-KR" altLang="en-US" dirty="0"/>
+              <a:t>분할 정복</a:t>
+            </a:r>
+          </a:p>
+        </p:txBody>
+      </p:sp>
+      <mc:AlternateContent xmlns:mc="http://schemas.openxmlformats.org/markup-compatibility/2006" xmlns:a14="http://schemas.microsoft.com/office/drawing/2010/main">
+        <mc:Choice Requires="a14">
+          <p:sp>
+            <p:nvSpPr>
+              <p:cNvPr id="3" name="내용 개체 틀 2">
+                <a:extLst>
+                  <a:ext uri="{FF2B5EF4-FFF2-40B4-BE49-F238E27FC236}">
+                    <a16:creationId xmlns:a16="http://schemas.microsoft.com/office/drawing/2014/main" id="{6810D25A-A1B8-DC81-D719-5257BF060EC3}"/>
+                  </a:ext>
+                </a:extLst>
+              </p:cNvPr>
+              <p:cNvSpPr>
+                <a:spLocks noGrp="1"/>
+              </p:cNvSpPr>
+              <p:nvPr>
+                <p:ph idx="1"/>
+              </p:nvPr>
+            </p:nvSpPr>
+            <p:spPr/>
+            <p:txBody>
+              <a:bodyPr>
+                <a:normAutofit/>
+              </a:bodyPr>
+              <a:lstStyle/>
+              <a:p>
+                <a:pPr>
+                  <a:lnSpc>
+                    <a:spcPct val="150000"/>
+                  </a:lnSpc>
+                </a:pPr>
+                <a:r>
+                  <a:rPr lang="ko-KR" altLang="en-US" dirty="0"/>
+                  <a:t>예시</a:t>
+                </a:r>
+                <a:r>
+                  <a:rPr lang="en-US" altLang="ko-KR" dirty="0"/>
+                  <a:t>: </a:t>
+                </a:r>
+                <a14:m>
+                  <m:oMath xmlns:m="http://schemas.openxmlformats.org/officeDocument/2006/math">
+                    <m:sSup>
+                      <m:sSupPr>
+                        <m:ctrlPr>
+                          <a:rPr lang="en-US" altLang="ko-KR" i="1" smtClean="0">
+                            <a:latin typeface="Cambria Math" panose="02040503050406030204" pitchFamily="18" charset="0"/>
+                          </a:rPr>
+                        </m:ctrlPr>
+                      </m:sSupPr>
+                      <m:e>
+                        <m:r>
+                          <a:rPr lang="en-US" altLang="ko-KR" b="0" i="1" smtClean="0">
+                            <a:latin typeface="Cambria Math" panose="02040503050406030204" pitchFamily="18" charset="0"/>
+                          </a:rPr>
+                          <m:t>𝑎</m:t>
+                        </m:r>
+                      </m:e>
+                      <m:sup>
+                        <m:r>
+                          <a:rPr lang="en-US" altLang="ko-KR" b="0" i="1" smtClean="0">
+                            <a:latin typeface="Cambria Math" panose="02040503050406030204" pitchFamily="18" charset="0"/>
+                          </a:rPr>
+                          <m:t>𝑏</m:t>
+                        </m:r>
+                      </m:sup>
+                    </m:sSup>
+                    <m:r>
+                      <a:rPr lang="en-US" altLang="ko-KR" b="0" i="1" smtClean="0">
+                        <a:latin typeface="Cambria Math" panose="02040503050406030204" pitchFamily="18" charset="0"/>
+                      </a:rPr>
+                      <m:t> </m:t>
+                    </m:r>
+                    <m:r>
+                      <a:rPr lang="en-US" altLang="ko-KR" i="1">
+                        <a:latin typeface="Cambria Math" panose="02040503050406030204" pitchFamily="18" charset="0"/>
+                      </a:rPr>
+                      <m:t>𝑚𝑜𝑑</m:t>
+                    </m:r>
+                    <m:r>
+                      <a:rPr lang="en-US" altLang="ko-KR" i="1">
+                        <a:latin typeface="Cambria Math" panose="02040503050406030204" pitchFamily="18" charset="0"/>
+                      </a:rPr>
+                      <m:t> </m:t>
+                    </m:r>
+                    <m:r>
+                      <a:rPr lang="en-US" altLang="ko-KR" i="1" smtClean="0">
+                        <a:latin typeface="Cambria Math" panose="02040503050406030204" pitchFamily="18" charset="0"/>
+                      </a:rPr>
+                      <m:t>𝑐</m:t>
+                    </m:r>
+                  </m:oMath>
+                </a14:m>
+                <a:r>
+                  <a:rPr lang="en-US" altLang="ko-KR" dirty="0"/>
+                  <a:t> </a:t>
+                </a:r>
+                <a:r>
+                  <a:rPr lang="ko-KR" altLang="en-US" dirty="0"/>
+                  <a:t>빠르게 계산하기</a:t>
+                </a:r>
+                <a:endParaRPr lang="en-US" altLang="ko-KR" dirty="0"/>
+              </a:p>
+              <a:p>
+                <a:pPr lvl="1">
+                  <a:lnSpc>
+                    <a:spcPct val="150000"/>
+                  </a:lnSpc>
+                </a:pPr>
+                <a:r>
+                  <a:rPr lang="en-US" altLang="ko-KR" dirty="0"/>
+                  <a:t>ex. </a:t>
+                </a:r>
+                <a14:m>
+                  <m:oMath xmlns:m="http://schemas.openxmlformats.org/officeDocument/2006/math">
+                    <m:sSup>
+                      <m:sSupPr>
+                        <m:ctrlPr>
+                          <a:rPr lang="en-US" altLang="ko-KR" i="1">
+                            <a:latin typeface="Cambria Math" panose="02040503050406030204" pitchFamily="18" charset="0"/>
+                          </a:rPr>
+                        </m:ctrlPr>
+                      </m:sSupPr>
+                      <m:e>
+                        <m:r>
+                          <a:rPr lang="en-US" altLang="ko-KR" b="0" i="1" smtClean="0">
+                            <a:latin typeface="Cambria Math" panose="02040503050406030204" pitchFamily="18" charset="0"/>
+                          </a:rPr>
+                          <m:t>3</m:t>
+                        </m:r>
+                      </m:e>
+                      <m:sup>
+                        <m:r>
+                          <a:rPr lang="en-US" altLang="ko-KR" b="0" i="1" smtClean="0">
+                            <a:latin typeface="Cambria Math" panose="02040503050406030204" pitchFamily="18" charset="0"/>
+                          </a:rPr>
+                          <m:t>5</m:t>
+                        </m:r>
+                      </m:sup>
+                    </m:sSup>
+                  </m:oMath>
+                </a14:m>
+                <a:r>
+                  <a:rPr lang="en-US" altLang="ko-KR" dirty="0"/>
+                  <a:t> </a:t>
+                </a:r>
+                <a:r>
+                  <a:rPr lang="ko-KR" altLang="en-US" dirty="0"/>
+                  <a:t>계산하기</a:t>
+                </a:r>
+                <a:endParaRPr lang="en-US" altLang="ko-KR" dirty="0"/>
+              </a:p>
+              <a:p>
+                <a:pPr lvl="2">
+                  <a:lnSpc>
+                    <a:spcPct val="150000"/>
+                  </a:lnSpc>
+                </a:pPr>
+                <a14:m>
+                  <m:oMath xmlns:m="http://schemas.openxmlformats.org/officeDocument/2006/math">
+                    <m:r>
+                      <a:rPr lang="en-US" altLang="ko-KR" b="0" i="1" dirty="0" smtClean="0">
+                        <a:latin typeface="Cambria Math" panose="02040503050406030204" pitchFamily="18" charset="0"/>
+                      </a:rPr>
+                      <m:t>𝑓</m:t>
+                    </m:r>
+                    <m:r>
+                      <a:rPr lang="en-US" altLang="ko-KR" i="1" dirty="0" smtClean="0">
+                        <a:latin typeface="Cambria Math" panose="02040503050406030204" pitchFamily="18" charset="0"/>
+                      </a:rPr>
+                      <m:t>(3, 5)</m:t>
+                    </m:r>
+                  </m:oMath>
+                </a14:m>
+                <a:r>
+                  <a:rPr lang="en-US" altLang="ko-KR" dirty="0"/>
+                  <a:t> =&gt; </a:t>
+                </a:r>
+                <a14:m>
+                  <m:oMath xmlns:m="http://schemas.openxmlformats.org/officeDocument/2006/math">
+                    <m:sSup>
+                      <m:sSupPr>
+                        <m:ctrlPr>
+                          <a:rPr lang="en-US" altLang="ko-KR" i="1" dirty="0" smtClean="0">
+                            <a:latin typeface="Cambria Math" panose="02040503050406030204" pitchFamily="18" charset="0"/>
+                          </a:rPr>
+                        </m:ctrlPr>
+                      </m:sSupPr>
+                      <m:e>
+                        <m:r>
+                          <a:rPr lang="en-US" altLang="ko-KR" i="1" dirty="0">
+                            <a:latin typeface="Cambria Math" panose="02040503050406030204" pitchFamily="18" charset="0"/>
+                          </a:rPr>
+                          <m:t>𝑓</m:t>
+                        </m:r>
+                        <m:r>
+                          <a:rPr lang="en-US" altLang="ko-KR" i="1" dirty="0">
+                            <a:latin typeface="Cambria Math" panose="02040503050406030204" pitchFamily="18" charset="0"/>
+                          </a:rPr>
+                          <m:t>(3, 2)</m:t>
+                        </m:r>
+                      </m:e>
+                      <m:sup>
+                        <m:r>
+                          <a:rPr lang="en-US" altLang="ko-KR" b="0" i="1" dirty="0" smtClean="0">
+                            <a:latin typeface="Cambria Math" panose="02040503050406030204" pitchFamily="18" charset="0"/>
+                          </a:rPr>
+                          <m:t>2</m:t>
+                        </m:r>
+                      </m:sup>
+                    </m:sSup>
+                    <m:r>
+                      <a:rPr lang="en-US" altLang="ko-KR" i="1" dirty="0">
+                        <a:latin typeface="Cambria Math" panose="02040503050406030204" pitchFamily="18" charset="0"/>
+                        <a:ea typeface="Cambria Math" panose="02040503050406030204" pitchFamily="18" charset="0"/>
+                      </a:rPr>
+                      <m:t>×</m:t>
+                    </m:r>
+                    <m:r>
+                      <a:rPr lang="en-US" altLang="ko-KR" b="0" i="1" dirty="0" smtClean="0">
+                        <a:latin typeface="Cambria Math" panose="02040503050406030204" pitchFamily="18" charset="0"/>
+                        <a:ea typeface="Cambria Math" panose="02040503050406030204" pitchFamily="18" charset="0"/>
+                      </a:rPr>
+                      <m:t>3</m:t>
+                    </m:r>
+                  </m:oMath>
+                </a14:m>
+                <a:r>
+                  <a:rPr lang="en-US" altLang="ko-KR" dirty="0"/>
+                  <a:t> (b</a:t>
+                </a:r>
+                <a:r>
+                  <a:rPr lang="ko-KR" altLang="en-US" dirty="0"/>
+                  <a:t>가 홀수</a:t>
+                </a:r>
+                <a:r>
+                  <a:rPr lang="en-US" altLang="ko-KR" dirty="0"/>
+                  <a:t>)</a:t>
+                </a:r>
+              </a:p>
+              <a:p>
+                <a:pPr lvl="2">
+                  <a:lnSpc>
+                    <a:spcPct val="150000"/>
+                  </a:lnSpc>
+                </a:pPr>
+                <a14:m>
+                  <m:oMath xmlns:m="http://schemas.openxmlformats.org/officeDocument/2006/math">
+                    <m:r>
+                      <a:rPr lang="en-US" altLang="ko-KR" i="1" dirty="0">
+                        <a:latin typeface="Cambria Math" panose="02040503050406030204" pitchFamily="18" charset="0"/>
+                      </a:rPr>
+                      <m:t>𝑓</m:t>
+                    </m:r>
+                    <m:r>
+                      <a:rPr lang="en-US" altLang="ko-KR" i="1" dirty="0">
+                        <a:latin typeface="Cambria Math" panose="02040503050406030204" pitchFamily="18" charset="0"/>
+                      </a:rPr>
+                      <m:t>(3, 2)</m:t>
+                    </m:r>
+                  </m:oMath>
+                </a14:m>
+                <a:r>
+                  <a:rPr lang="en-US" altLang="ko-KR" dirty="0"/>
+                  <a:t> =&gt;</a:t>
+                </a:r>
+                <a14:m>
+                  <m:oMath xmlns:m="http://schemas.openxmlformats.org/officeDocument/2006/math">
+                    <m:sSup>
+                      <m:sSupPr>
+                        <m:ctrlPr>
+                          <a:rPr lang="en-US" altLang="ko-KR" i="1" dirty="0">
+                            <a:latin typeface="Cambria Math" panose="02040503050406030204" pitchFamily="18" charset="0"/>
+                          </a:rPr>
+                        </m:ctrlPr>
+                      </m:sSupPr>
+                      <m:e>
+                        <m:r>
+                          <a:rPr lang="en-US" altLang="ko-KR" i="1" dirty="0">
+                            <a:latin typeface="Cambria Math" panose="02040503050406030204" pitchFamily="18" charset="0"/>
+                          </a:rPr>
+                          <m:t>𝑓</m:t>
+                        </m:r>
+                        <m:r>
+                          <a:rPr lang="en-US" altLang="ko-KR" i="1" dirty="0">
+                            <a:latin typeface="Cambria Math" panose="02040503050406030204" pitchFamily="18" charset="0"/>
+                          </a:rPr>
+                          <m:t>(3, 1)</m:t>
+                        </m:r>
+                      </m:e>
+                      <m:sup>
+                        <m:r>
+                          <a:rPr lang="en-US" altLang="ko-KR" i="1" dirty="0">
+                            <a:latin typeface="Cambria Math" panose="02040503050406030204" pitchFamily="18" charset="0"/>
+                          </a:rPr>
+                          <m:t>2</m:t>
+                        </m:r>
+                      </m:sup>
+                    </m:sSup>
+                  </m:oMath>
+                </a14:m>
+                <a:r>
+                  <a:rPr lang="en-US" altLang="ko-KR" dirty="0"/>
+                  <a:t> (b</a:t>
+                </a:r>
+                <a:r>
+                  <a:rPr lang="ko-KR" altLang="en-US" dirty="0"/>
+                  <a:t>가 짝수</a:t>
+                </a:r>
+                <a:r>
+                  <a:rPr lang="en-US" altLang="ko-KR" dirty="0"/>
+                  <a:t>)</a:t>
+                </a:r>
+              </a:p>
+              <a:p>
+                <a:pPr lvl="2">
+                  <a:lnSpc>
+                    <a:spcPct val="150000"/>
+                  </a:lnSpc>
+                </a:pPr>
+                <a14:m>
+                  <m:oMath xmlns:m="http://schemas.openxmlformats.org/officeDocument/2006/math">
+                    <m:r>
+                      <a:rPr lang="en-US" altLang="ko-KR" i="1" dirty="0">
+                        <a:latin typeface="Cambria Math" panose="02040503050406030204" pitchFamily="18" charset="0"/>
+                      </a:rPr>
+                      <m:t>𝑓</m:t>
+                    </m:r>
+                    <m:r>
+                      <a:rPr lang="en-US" altLang="ko-KR" i="1" dirty="0">
+                        <a:latin typeface="Cambria Math" panose="02040503050406030204" pitchFamily="18" charset="0"/>
+                      </a:rPr>
+                      <m:t>(3, 1)</m:t>
+                    </m:r>
+                  </m:oMath>
+                </a14:m>
+                <a:r>
+                  <a:rPr lang="en-US" altLang="ko-KR" dirty="0"/>
+                  <a:t> =&gt; </a:t>
+                </a:r>
+                <a14:m>
+                  <m:oMath xmlns:m="http://schemas.openxmlformats.org/officeDocument/2006/math">
+                    <m:sSup>
+                      <m:sSupPr>
+                        <m:ctrlPr>
+                          <a:rPr lang="en-US" altLang="ko-KR" i="1" dirty="0">
+                            <a:latin typeface="Cambria Math" panose="02040503050406030204" pitchFamily="18" charset="0"/>
+                          </a:rPr>
+                        </m:ctrlPr>
+                      </m:sSupPr>
+                      <m:e>
+                        <m:r>
+                          <a:rPr lang="en-US" altLang="ko-KR" i="1" dirty="0">
+                            <a:latin typeface="Cambria Math" panose="02040503050406030204" pitchFamily="18" charset="0"/>
+                          </a:rPr>
+                          <m:t>𝑓</m:t>
+                        </m:r>
+                        <m:r>
+                          <a:rPr lang="en-US" altLang="ko-KR" i="1" dirty="0">
+                            <a:latin typeface="Cambria Math" panose="02040503050406030204" pitchFamily="18" charset="0"/>
+                          </a:rPr>
+                          <m:t>(3, 0)</m:t>
+                        </m:r>
+                      </m:e>
+                      <m:sup>
+                        <m:r>
+                          <a:rPr lang="en-US" altLang="ko-KR" i="1" dirty="0">
+                            <a:latin typeface="Cambria Math" panose="02040503050406030204" pitchFamily="18" charset="0"/>
+                          </a:rPr>
+                          <m:t>2</m:t>
+                        </m:r>
+                      </m:sup>
+                    </m:sSup>
+                    <m:r>
+                      <a:rPr lang="en-US" altLang="ko-KR" i="1" dirty="0">
+                        <a:latin typeface="Cambria Math" panose="02040503050406030204" pitchFamily="18" charset="0"/>
+                        <a:ea typeface="Cambria Math" panose="02040503050406030204" pitchFamily="18" charset="0"/>
+                      </a:rPr>
+                      <m:t>×3</m:t>
+                    </m:r>
+                  </m:oMath>
+                </a14:m>
+                <a:r>
+                  <a:rPr lang="en-US" altLang="ko-KR" dirty="0"/>
+                  <a:t> (b</a:t>
+                </a:r>
+                <a:r>
+                  <a:rPr lang="ko-KR" altLang="en-US" dirty="0"/>
+                  <a:t>가 홀수</a:t>
+                </a:r>
+                <a:r>
+                  <a:rPr lang="en-US" altLang="ko-KR" dirty="0"/>
+                  <a:t>)</a:t>
+                </a:r>
+              </a:p>
+              <a:p>
+                <a:pPr lvl="2">
+                  <a:lnSpc>
+                    <a:spcPct val="150000"/>
+                  </a:lnSpc>
+                </a:pPr>
+                <a14:m>
+                  <m:oMath xmlns:m="http://schemas.openxmlformats.org/officeDocument/2006/math">
+                    <m:r>
+                      <a:rPr lang="en-US" altLang="ko-KR" i="1" dirty="0">
+                        <a:latin typeface="Cambria Math" panose="02040503050406030204" pitchFamily="18" charset="0"/>
+                      </a:rPr>
+                      <m:t>𝑓</m:t>
+                    </m:r>
+                    <m:r>
+                      <a:rPr lang="en-US" altLang="ko-KR" i="1" dirty="0">
+                        <a:latin typeface="Cambria Math" panose="02040503050406030204" pitchFamily="18" charset="0"/>
+                      </a:rPr>
+                      <m:t>(3, 0)</m:t>
+                    </m:r>
+                  </m:oMath>
+                </a14:m>
+                <a:r>
+                  <a:rPr lang="en-US" altLang="ko-KR" dirty="0"/>
+                  <a:t> =&gt; 1 (b</a:t>
+                </a:r>
+                <a:r>
+                  <a:rPr lang="ko-KR" altLang="en-US" dirty="0"/>
+                  <a:t>가 </a:t>
+                </a:r>
+                <a:r>
+                  <a:rPr lang="en-US" altLang="ko-KR" dirty="0"/>
+                  <a:t>base case)</a:t>
+                </a:r>
+              </a:p>
+              <a:p>
+                <a:pPr lvl="2">
+                  <a:lnSpc>
+                    <a:spcPct val="150000"/>
+                  </a:lnSpc>
+                </a:pPr>
+                <a14:m>
+                  <m:oMath xmlns:m="http://schemas.openxmlformats.org/officeDocument/2006/math">
+                    <m:r>
+                      <a:rPr lang="en-US" altLang="ko-KR" i="1" dirty="0">
+                        <a:latin typeface="Cambria Math" panose="02040503050406030204" pitchFamily="18" charset="0"/>
+                      </a:rPr>
+                      <m:t>𝑓</m:t>
+                    </m:r>
+                    <m:r>
+                      <a:rPr lang="en-US" altLang="ko-KR" i="1" dirty="0">
+                        <a:latin typeface="Cambria Math" panose="02040503050406030204" pitchFamily="18" charset="0"/>
+                      </a:rPr>
+                      <m:t>(3, 5)</m:t>
+                    </m:r>
+                  </m:oMath>
+                </a14:m>
+                <a:r>
+                  <a:rPr lang="en-US" altLang="ko-KR" dirty="0"/>
+                  <a:t> = </a:t>
+                </a:r>
+                <a14:m>
+                  <m:oMath xmlns:m="http://schemas.openxmlformats.org/officeDocument/2006/math">
+                    <m:sSup>
+                      <m:sSupPr>
+                        <m:ctrlPr>
+                          <a:rPr lang="en-US" altLang="ko-KR" i="1" dirty="0" smtClean="0">
+                            <a:latin typeface="Cambria Math" panose="02040503050406030204" pitchFamily="18" charset="0"/>
+                          </a:rPr>
+                        </m:ctrlPr>
+                      </m:sSupPr>
+                      <m:e>
+                        <m:sSup>
+                          <m:sSupPr>
+                            <m:ctrlPr>
+                              <a:rPr lang="en-US" altLang="ko-KR" i="1" dirty="0" smtClean="0">
+                                <a:latin typeface="Cambria Math" panose="02040503050406030204" pitchFamily="18" charset="0"/>
+                              </a:rPr>
+                            </m:ctrlPr>
+                          </m:sSupPr>
+                          <m:e>
+                            <m:r>
+                              <a:rPr lang="en-US" altLang="ko-KR" b="0" i="1" dirty="0" smtClean="0">
+                                <a:latin typeface="Cambria Math" panose="02040503050406030204" pitchFamily="18" charset="0"/>
+                              </a:rPr>
+                              <m:t>(1</m:t>
+                            </m:r>
+                            <m:r>
+                              <a:rPr lang="en-US" altLang="ko-KR" i="1" dirty="0">
+                                <a:latin typeface="Cambria Math" panose="02040503050406030204" pitchFamily="18" charset="0"/>
+                                <a:ea typeface="Cambria Math" panose="02040503050406030204" pitchFamily="18" charset="0"/>
+                              </a:rPr>
+                              <m:t>×3</m:t>
+                            </m:r>
+                            <m:r>
+                              <a:rPr lang="en-US" altLang="ko-KR" b="0" i="1" dirty="0" smtClean="0">
+                                <a:latin typeface="Cambria Math" panose="02040503050406030204" pitchFamily="18" charset="0"/>
+                                <a:ea typeface="Cambria Math" panose="02040503050406030204" pitchFamily="18" charset="0"/>
+                              </a:rPr>
+                              <m:t>)</m:t>
+                            </m:r>
+                          </m:e>
+                          <m:sup>
+                            <m:r>
+                              <a:rPr lang="en-US" altLang="ko-KR" b="0" i="1" dirty="0" smtClean="0">
+                                <a:latin typeface="Cambria Math" panose="02040503050406030204" pitchFamily="18" charset="0"/>
+                              </a:rPr>
+                              <m:t>2</m:t>
+                            </m:r>
+                          </m:sup>
+                        </m:sSup>
+                      </m:e>
+                      <m:sup>
+                        <m:r>
+                          <a:rPr lang="en-US" altLang="ko-KR" b="0" i="1" dirty="0" smtClean="0">
+                            <a:latin typeface="Cambria Math" panose="02040503050406030204" pitchFamily="18" charset="0"/>
+                          </a:rPr>
+                          <m:t>2</m:t>
+                        </m:r>
+                      </m:sup>
+                    </m:sSup>
+                  </m:oMath>
+                </a14:m>
+                <a:r>
+                  <a:rPr lang="en-US" altLang="ko-KR" dirty="0">
+                    <a:ea typeface="Cambria Math" panose="02040503050406030204" pitchFamily="18" charset="0"/>
+                  </a:rPr>
+                  <a:t> </a:t>
+                </a:r>
+                <a14:m>
+                  <m:oMath xmlns:m="http://schemas.openxmlformats.org/officeDocument/2006/math">
+                    <m:r>
+                      <a:rPr lang="en-US" altLang="ko-KR" i="1" dirty="0">
+                        <a:latin typeface="Cambria Math" panose="02040503050406030204" pitchFamily="18" charset="0"/>
+                        <a:ea typeface="Cambria Math" panose="02040503050406030204" pitchFamily="18" charset="0"/>
+                      </a:rPr>
+                      <m:t>×3</m:t>
+                    </m:r>
+                  </m:oMath>
+                </a14:m>
+                <a:endParaRPr lang="en-US" altLang="ko-KR" dirty="0"/>
+              </a:p>
+            </p:txBody>
+          </p:sp>
+        </mc:Choice>
+        <mc:Fallback xmlns="">
+          <p:sp>
+            <p:nvSpPr>
+              <p:cNvPr id="3" name="내용 개체 틀 2">
+                <a:extLst>
+                  <a:ext uri="{FF2B5EF4-FFF2-40B4-BE49-F238E27FC236}">
+                    <a16:creationId xmlns:a16="http://schemas.microsoft.com/office/drawing/2014/main" id="{6810D25A-A1B8-DC81-D719-5257BF060EC3}"/>
+                  </a:ext>
+                </a:extLst>
+              </p:cNvPr>
+              <p:cNvSpPr>
+                <a:spLocks noGrp="1" noRot="1" noChangeAspect="1" noMove="1" noResize="1" noEditPoints="1" noAdjustHandles="1" noChangeArrowheads="1" noChangeShapeType="1" noTextEdit="1"/>
+              </p:cNvSpPr>
+              <p:nvPr>
+                <p:ph idx="1"/>
+              </p:nvPr>
+            </p:nvSpPr>
+            <p:spPr>
+              <a:blipFill>
+                <a:blip r:embed="rId2"/>
+                <a:stretch>
+                  <a:fillRect l="-1043"/>
+                </a:stretch>
+              </a:blipFill>
+            </p:spPr>
+            <p:txBody>
+              <a:bodyPr/>
+              <a:lstStyle/>
+              <a:p>
+                <a:r>
+                  <a:rPr lang="ko-KR" altLang="en-US">
+                    <a:noFill/>
+                  </a:rPr>
+                  <a:t> </a:t>
+                </a:r>
+              </a:p>
+            </p:txBody>
+          </p:sp>
+        </mc:Fallback>
+      </mc:AlternateContent>
+    </p:spTree>
+    <p:extLst>
+      <p:ext uri="{BB962C8B-B14F-4D97-AF65-F5344CB8AC3E}">
+        <p14:creationId xmlns:p14="http://schemas.microsoft.com/office/powerpoint/2010/main" val="1135532845"/>
+      </p:ext>
+    </p:extLst>
+  </p:cSld>
+  <p:clrMapOvr>
+    <a:masterClrMapping/>
+  </p:clrMapOvr>
+</p:sld>
+</file>
+
+<file path=ppt/slides/slide13.xml><?xml version="1.0" encoding="utf-8"?>
+<p:sld xmlns:a="http://schemas.openxmlformats.org/drawingml/2006/main" xmlns:r="http://schemas.openxmlformats.org/officeDocument/2006/relationships" xmlns:p="http://schemas.openxmlformats.org/presentationml/2006/main">
+  <p:cSld>
+    <p:spTree>
+      <p:nvGrpSpPr>
+        <p:cNvPr id="1" name="">
+          <a:extLst>
+            <a:ext uri="{FF2B5EF4-FFF2-40B4-BE49-F238E27FC236}">
+              <a16:creationId xmlns:a16="http://schemas.microsoft.com/office/drawing/2014/main" id="{457AD601-8821-01D4-5C83-E99C137ADE91}"/>
+            </a:ext>
+          </a:extLst>
+        </p:cNvPr>
+        <p:cNvGrpSpPr/>
+        <p:nvPr/>
+      </p:nvGrpSpPr>
+      <p:grpSpPr>
+        <a:xfrm>
+          <a:off x="0" y="0"/>
+          <a:ext cx="0" cy="0"/>
+          <a:chOff x="0" y="0"/>
+          <a:chExt cx="0" cy="0"/>
+        </a:xfrm>
+      </p:grpSpPr>
+      <p:sp>
+        <p:nvSpPr>
+          <p:cNvPr id="2" name="제목 1">
+            <a:extLst>
+              <a:ext uri="{FF2B5EF4-FFF2-40B4-BE49-F238E27FC236}">
+                <a16:creationId xmlns:a16="http://schemas.microsoft.com/office/drawing/2014/main" id="{D3AC89C4-59F5-E472-7844-194267A20C87}"/>
+              </a:ext>
+            </a:extLst>
+          </p:cNvPr>
+          <p:cNvSpPr>
+            <a:spLocks noGrp="1"/>
+          </p:cNvSpPr>
+          <p:nvPr>
+            <p:ph type="title"/>
+          </p:nvPr>
+        </p:nvSpPr>
+        <p:spPr/>
+        <p:txBody>
+          <a:bodyPr/>
+          <a:lstStyle/>
+          <a:p>
+            <a:r>
+              <a:rPr lang="ko-KR" altLang="en-US" dirty="0"/>
+              <a:t>분할 정복 </a:t>
+            </a:r>
+            <a:r>
+              <a:rPr lang="en-US" altLang="ko-KR" dirty="0"/>
+              <a:t>- </a:t>
+            </a:r>
+            <a:r>
+              <a:rPr lang="ko-KR" altLang="en-US" dirty="0"/>
+              <a:t>예시문제</a:t>
+            </a:r>
+          </a:p>
+        </p:txBody>
+      </p:sp>
+      <mc:AlternateContent xmlns:mc="http://schemas.openxmlformats.org/markup-compatibility/2006" xmlns:a14="http://schemas.microsoft.com/office/drawing/2010/main">
+        <mc:Choice Requires="a14">
+          <p:sp>
+            <p:nvSpPr>
+              <p:cNvPr id="3" name="내용 개체 틀 2">
+                <a:extLst>
+                  <a:ext uri="{FF2B5EF4-FFF2-40B4-BE49-F238E27FC236}">
+                    <a16:creationId xmlns:a16="http://schemas.microsoft.com/office/drawing/2014/main" id="{2F8A2ECA-A0D2-9FEA-F562-E3E758744FA3}"/>
+                  </a:ext>
+                </a:extLst>
+              </p:cNvPr>
+              <p:cNvSpPr>
+                <a:spLocks noGrp="1"/>
+              </p:cNvSpPr>
+              <p:nvPr>
+                <p:ph idx="1"/>
+              </p:nvPr>
+            </p:nvSpPr>
+            <p:spPr/>
+            <p:txBody>
+              <a:bodyPr>
+                <a:normAutofit/>
+              </a:bodyPr>
+              <a:lstStyle/>
+              <a:p>
+                <a14:m>
+                  <m:oMath xmlns:m="http://schemas.openxmlformats.org/officeDocument/2006/math">
+                    <m:sSup>
+                      <m:sSupPr>
+                        <m:ctrlPr>
+                          <a:rPr lang="en-US" altLang="ko-KR" i="1" smtClean="0">
+                            <a:latin typeface="Cambria Math" panose="02040503050406030204" pitchFamily="18" charset="0"/>
+                          </a:rPr>
+                        </m:ctrlPr>
+                      </m:sSupPr>
+                      <m:e>
+                        <m:r>
+                          <a:rPr lang="en-US" altLang="ko-KR" b="0" i="1" smtClean="0">
+                            <a:latin typeface="Cambria Math" panose="02040503050406030204" pitchFamily="18" charset="0"/>
+                          </a:rPr>
+                          <m:t>𝑎</m:t>
+                        </m:r>
+                      </m:e>
+                      <m:sup>
+                        <m:r>
+                          <a:rPr lang="en-US" altLang="ko-KR" b="0" i="1" smtClean="0">
+                            <a:latin typeface="Cambria Math" panose="02040503050406030204" pitchFamily="18" charset="0"/>
+                          </a:rPr>
+                          <m:t>𝑏</m:t>
+                        </m:r>
+                      </m:sup>
+                    </m:sSup>
+                    <m:r>
+                      <a:rPr lang="en-US" altLang="ko-KR" b="0" i="1" smtClean="0">
+                        <a:latin typeface="Cambria Math" panose="02040503050406030204" pitchFamily="18" charset="0"/>
+                      </a:rPr>
+                      <m:t> </m:t>
+                    </m:r>
+                    <m:r>
+                      <a:rPr lang="en-US" altLang="ko-KR" b="0" i="1" smtClean="0">
+                        <a:latin typeface="Cambria Math" panose="02040503050406030204" pitchFamily="18" charset="0"/>
+                      </a:rPr>
+                      <m:t>𝑚𝑜𝑑</m:t>
+                    </m:r>
+                    <m:r>
+                      <a:rPr lang="en-US" altLang="ko-KR" b="0" i="0" smtClean="0">
+                        <a:latin typeface="Cambria Math" panose="02040503050406030204" pitchFamily="18" charset="0"/>
+                      </a:rPr>
+                      <m:t> </m:t>
+                    </m:r>
+                    <m:r>
+                      <m:rPr>
+                        <m:sty m:val="p"/>
+                      </m:rPr>
+                      <a:rPr lang="en-US" altLang="ko-KR" b="0" i="0" smtClean="0">
+                        <a:latin typeface="Cambria Math" panose="02040503050406030204" pitchFamily="18" charset="0"/>
+                      </a:rPr>
+                      <m:t>c</m:t>
+                    </m:r>
+                  </m:oMath>
+                </a14:m>
+                <a:r>
+                  <a:rPr lang="en-US" altLang="ko-KR" dirty="0"/>
+                  <a:t>: </a:t>
+                </a:r>
+                <a:r>
+                  <a:rPr lang="en-US" altLang="ko-KR" dirty="0">
+                    <a:hlinkClick r:id="rId2"/>
+                  </a:rPr>
+                  <a:t>https://www.acmicpc.net/problem/1629</a:t>
+                </a:r>
+                <a:endParaRPr lang="en-US" altLang="ko-KR" dirty="0"/>
+              </a:p>
+              <a:p>
+                <a:pPr lvl="1"/>
+                <a:r>
+                  <a:rPr lang="ko-KR" altLang="en-US" dirty="0"/>
+                  <a:t>예시 답안 </a:t>
+                </a:r>
+                <a:r>
+                  <a:rPr lang="en-US" altLang="ko-KR" dirty="0"/>
+                  <a:t>(C++) : </a:t>
+                </a:r>
+                <a:r>
+                  <a:rPr lang="en-US" altLang="ko-KR" dirty="0">
+                    <a:hlinkClick r:id="rId3"/>
+                  </a:rPr>
+                  <a:t>http://boj.kr/6ec96420913547fca1615d2215add62b</a:t>
+                </a:r>
+                <a:endParaRPr lang="en-US" altLang="ko-KR" dirty="0"/>
+              </a:p>
+              <a:p>
+                <a:pPr lvl="1"/>
+                <a:r>
+                  <a:rPr lang="ko-KR" altLang="en-US" dirty="0"/>
+                  <a:t>예시 답안 </a:t>
+                </a:r>
+                <a:r>
+                  <a:rPr lang="en-US" altLang="ko-KR" dirty="0"/>
+                  <a:t>(Java) : </a:t>
+                </a:r>
+                <a:r>
+                  <a:rPr lang="en-US" altLang="ko-KR" dirty="0">
+                    <a:hlinkClick r:id="rId4"/>
+                  </a:rPr>
+                  <a:t>http://boj.kr/f2fced4ddffb45ed9593a3155e8e459e</a:t>
+                </a:r>
+                <a:endParaRPr lang="en-US" altLang="ko-KR" dirty="0"/>
+              </a:p>
+            </p:txBody>
+          </p:sp>
+        </mc:Choice>
+        <mc:Fallback xmlns="">
+          <p:sp>
+            <p:nvSpPr>
+              <p:cNvPr id="3" name="내용 개체 틀 2">
+                <a:extLst>
+                  <a:ext uri="{FF2B5EF4-FFF2-40B4-BE49-F238E27FC236}">
+                    <a16:creationId xmlns:a16="http://schemas.microsoft.com/office/drawing/2014/main" id="{2F8A2ECA-A0D2-9FEA-F562-E3E758744FA3}"/>
+                  </a:ext>
+                </a:extLst>
+              </p:cNvPr>
+              <p:cNvSpPr>
+                <a:spLocks noGrp="1" noRot="1" noChangeAspect="1" noMove="1" noResize="1" noEditPoints="1" noAdjustHandles="1" noChangeArrowheads="1" noChangeShapeType="1" noTextEdit="1"/>
+              </p:cNvSpPr>
+              <p:nvPr>
+                <p:ph idx="1"/>
+              </p:nvPr>
+            </p:nvSpPr>
+            <p:spPr>
+              <a:blipFill>
+                <a:blip r:embed="rId5"/>
+                <a:stretch>
+                  <a:fillRect t="-2241" r="-580"/>
+                </a:stretch>
+              </a:blipFill>
+            </p:spPr>
+            <p:txBody>
+              <a:bodyPr/>
+              <a:lstStyle/>
+              <a:p>
+                <a:r>
+                  <a:rPr lang="ko-KR" altLang="en-US">
+                    <a:noFill/>
+                  </a:rPr>
+                  <a:t> </a:t>
+                </a:r>
+              </a:p>
+            </p:txBody>
+          </p:sp>
+        </mc:Fallback>
+      </mc:AlternateContent>
+    </p:spTree>
+    <p:extLst>
+      <p:ext uri="{BB962C8B-B14F-4D97-AF65-F5344CB8AC3E}">
+        <p14:creationId xmlns:p14="http://schemas.microsoft.com/office/powerpoint/2010/main" val="2977871052"/>
+      </p:ext>
+    </p:extLst>
+  </p:cSld>
+  <p:clrMapOvr>
+    <a:masterClrMapping/>
+  </p:clrMapOvr>
+</p:sld>
+</file>
+
+<file path=ppt/slides/slide14.xml><?xml version="1.0" encoding="utf-8"?>
+<p:sld xmlns:a="http://schemas.openxmlformats.org/drawingml/2006/main" xmlns:r="http://schemas.openxmlformats.org/officeDocument/2006/relationships" xmlns:p="http://schemas.openxmlformats.org/presentationml/2006/main">
+  <p:cSld>
+    <p:spTree>
+      <p:nvGrpSpPr>
+        <p:cNvPr id="1" name="">
+          <a:extLst>
+            <a:ext uri="{FF2B5EF4-FFF2-40B4-BE49-F238E27FC236}">
+              <a16:creationId xmlns:a16="http://schemas.microsoft.com/office/drawing/2014/main" id="{4C94D3B2-501E-0EA5-ADB0-5238D20F807C}"/>
+            </a:ext>
+          </a:extLst>
+        </p:cNvPr>
+        <p:cNvGrpSpPr/>
+        <p:nvPr/>
+      </p:nvGrpSpPr>
+      <p:grpSpPr>
+        <a:xfrm>
+          <a:off x="0" y="0"/>
+          <a:ext cx="0" cy="0"/>
+          <a:chOff x="0" y="0"/>
+          <a:chExt cx="0" cy="0"/>
+        </a:xfrm>
+      </p:grpSpPr>
+      <p:sp>
+        <p:nvSpPr>
+          <p:cNvPr id="2" name="제목 1">
+            <a:extLst>
+              <a:ext uri="{FF2B5EF4-FFF2-40B4-BE49-F238E27FC236}">
+                <a16:creationId xmlns:a16="http://schemas.microsoft.com/office/drawing/2014/main" id="{C78CDDE2-7520-0824-BF4E-918817441F67}"/>
+              </a:ext>
+            </a:extLst>
+          </p:cNvPr>
+          <p:cNvSpPr>
+            <a:spLocks noGrp="1"/>
+          </p:cNvSpPr>
+          <p:nvPr>
+            <p:ph type="title"/>
+          </p:nvPr>
+        </p:nvSpPr>
+        <p:spPr/>
+        <p:txBody>
+          <a:bodyPr/>
+          <a:lstStyle/>
+          <a:p>
+            <a:r>
+              <a:rPr lang="ko-KR" altLang="en-US" dirty="0"/>
+              <a:t>복습 문제</a:t>
+            </a:r>
+          </a:p>
+        </p:txBody>
+      </p:sp>
+      <p:sp>
+        <p:nvSpPr>
+          <p:cNvPr id="3" name="내용 개체 틀 2">
+            <a:extLst>
+              <a:ext uri="{FF2B5EF4-FFF2-40B4-BE49-F238E27FC236}">
+                <a16:creationId xmlns:a16="http://schemas.microsoft.com/office/drawing/2014/main" id="{7CDCE6C2-8E1A-6997-8C8E-B3BF38CD074B}"/>
+              </a:ext>
+            </a:extLst>
+          </p:cNvPr>
+          <p:cNvSpPr>
+            <a:spLocks noGrp="1"/>
+          </p:cNvSpPr>
+          <p:nvPr>
+            <p:ph idx="1"/>
+          </p:nvPr>
+        </p:nvSpPr>
+        <p:spPr/>
+        <p:txBody>
+          <a:bodyPr/>
+          <a:lstStyle/>
+          <a:p>
+            <a:r>
+              <a:rPr lang="ko-KR" altLang="en-US" dirty="0"/>
+              <a:t>재귀 </a:t>
+            </a:r>
+            <a:r>
+              <a:rPr lang="en-US" altLang="ko-KR" dirty="0"/>
+              <a:t>: </a:t>
+            </a:r>
+            <a:r>
+              <a:rPr lang="en-US" altLang="ko-KR" dirty="0">
+                <a:hlinkClick r:id="rId2"/>
+              </a:rPr>
+              <a:t>https://www.acmicpc.net/step/19</a:t>
+            </a:r>
+            <a:endParaRPr lang="en-US" altLang="ko-KR" dirty="0"/>
+          </a:p>
+          <a:p>
+            <a:r>
+              <a:rPr lang="ko-KR" altLang="en-US" dirty="0"/>
+              <a:t>분할 정복 </a:t>
+            </a:r>
+            <a:r>
+              <a:rPr lang="en-US" altLang="ko-KR" dirty="0"/>
+              <a:t>: </a:t>
+            </a:r>
+            <a:r>
+              <a:rPr lang="en-US" altLang="ko-KR" dirty="0">
+                <a:hlinkClick r:id="rId3"/>
+              </a:rPr>
+              <a:t>https://www.acmicpc.net/step/20</a:t>
+            </a:r>
+            <a:endParaRPr lang="en-US" altLang="ko-KR" dirty="0"/>
+          </a:p>
+          <a:p>
+            <a:endParaRPr lang="ko-KR" altLang="en-US" dirty="0"/>
+          </a:p>
+        </p:txBody>
+      </p:sp>
+    </p:spTree>
+    <p:extLst>
+      <p:ext uri="{BB962C8B-B14F-4D97-AF65-F5344CB8AC3E}">
+        <p14:creationId xmlns:p14="http://schemas.microsoft.com/office/powerpoint/2010/main" val="1355727632"/>
+      </p:ext>
+    </p:extLst>
+  </p:cSld>
+  <p:clrMapOvr>
+    <a:masterClrMapping/>
+  </p:clrMapOvr>
+</p:sld>
+</file>
+
+<file path=ppt/slides/slide2.xml><?xml version="1.0" encoding="utf-8"?>
 <p:sld xmlns:a="http://schemas.openxmlformats.org/drawingml/2006/main" xmlns:r="http://schemas.openxmlformats.org/officeDocument/2006/relationships" xmlns:p="http://schemas.openxmlformats.org/presentationml/2006/main">
   <p:cSld>
     <p:spTree>
@@ -4596,7 +6934,7 @@
 </p:sld>
 </file>
 
-<file path=ppt/slides/slide4.xml><?xml version="1.0" encoding="utf-8"?>
+<file path=ppt/slides/slide3.xml><?xml version="1.0" encoding="utf-8"?>
 <p:sld xmlns:a="http://schemas.openxmlformats.org/drawingml/2006/main" xmlns:r="http://schemas.openxmlformats.org/officeDocument/2006/relationships" xmlns:p="http://schemas.openxmlformats.org/presentationml/2006/main">
   <p:cSld>
     <p:spTree>
@@ -4647,109 +6985,505 @@
           </a:p>
         </p:txBody>
       </p:sp>
-      <p:sp>
-        <p:nvSpPr>
-          <p:cNvPr id="3" name="내용 개체 틀 2">
-            <a:extLst>
-              <a:ext uri="{FF2B5EF4-FFF2-40B4-BE49-F238E27FC236}">
-                <a16:creationId xmlns:a16="http://schemas.microsoft.com/office/drawing/2014/main" id="{1EF022A7-4B37-37DD-155C-571C7FDE91C1}"/>
-              </a:ext>
-            </a:extLst>
-          </p:cNvPr>
-          <p:cNvSpPr>
-            <a:spLocks noGrp="1"/>
-          </p:cNvSpPr>
-          <p:nvPr>
-            <p:ph idx="1"/>
-          </p:nvPr>
-        </p:nvSpPr>
-        <p:spPr/>
-        <p:txBody>
-          <a:bodyPr/>
-          <a:lstStyle/>
-          <a:p>
-            <a:r>
-              <a:rPr lang="ko-KR" altLang="en-US" dirty="0"/>
-              <a:t>접근하려는 문제가 똑같은 문제로 나눌 수 있을 때 유용함</a:t>
-            </a:r>
-            <a:endParaRPr lang="en-US" altLang="ko-KR" dirty="0"/>
-          </a:p>
-          <a:p>
-            <a:pPr lvl="1"/>
-            <a:r>
-              <a:rPr lang="ko-KR" altLang="en-US" dirty="0"/>
-              <a:t>예</a:t>
-            </a:r>
-            <a:r>
-              <a:rPr lang="en-US" altLang="ko-KR" dirty="0"/>
-              <a:t>: 1~5 </a:t>
-            </a:r>
-            <a:r>
-              <a:rPr lang="ko-KR" altLang="en-US" dirty="0"/>
-              <a:t>까지 </a:t>
-            </a:r>
-            <a:r>
-              <a:rPr lang="ko-KR" altLang="en-US" dirty="0" err="1"/>
-              <a:t>더하시오</a:t>
-            </a:r>
-            <a:endParaRPr lang="en-US" altLang="ko-KR" dirty="0"/>
-          </a:p>
-          <a:p>
-            <a:pPr lvl="1"/>
-            <a:r>
-              <a:rPr lang="ko-KR" altLang="en-US" dirty="0"/>
-              <a:t>이 문제는 </a:t>
-            </a:r>
-            <a:r>
-              <a:rPr lang="en-US" altLang="ko-KR" dirty="0"/>
-              <a:t>“1~4 </a:t>
-            </a:r>
-            <a:r>
-              <a:rPr lang="ko-KR" altLang="en-US" dirty="0"/>
-              <a:t>까지 더한 뒤</a:t>
-            </a:r>
-            <a:r>
-              <a:rPr lang="en-US" altLang="ko-KR" dirty="0"/>
-              <a:t> 5 </a:t>
-            </a:r>
-            <a:r>
-              <a:rPr lang="ko-KR" altLang="en-US" dirty="0"/>
-              <a:t>를 </a:t>
-            </a:r>
-            <a:r>
-              <a:rPr lang="ko-KR" altLang="en-US" dirty="0" err="1"/>
-              <a:t>더하시오</a:t>
-            </a:r>
-            <a:r>
-              <a:rPr lang="en-US" altLang="ko-KR" dirty="0"/>
-              <a:t>”</a:t>
-            </a:r>
-            <a:r>
-              <a:rPr lang="ko-KR" altLang="en-US" dirty="0"/>
-              <a:t>로 문제를 나눌 수 있음</a:t>
-            </a:r>
-            <a:endParaRPr lang="en-US" altLang="ko-KR" dirty="0"/>
-          </a:p>
-          <a:p>
-            <a:endParaRPr lang="en-US" altLang="ko-KR" dirty="0"/>
-          </a:p>
-          <a:p>
-            <a:r>
-              <a:rPr lang="ko-KR" altLang="en-US" dirty="0"/>
-              <a:t>접근하려는 문제를 단계별로 접근할 때</a:t>
-            </a:r>
-            <a:r>
-              <a:rPr lang="en-US" altLang="ko-KR" dirty="0"/>
-              <a:t>, </a:t>
-            </a:r>
-            <a:r>
-              <a:rPr lang="ko-KR" altLang="en-US" dirty="0"/>
-              <a:t>이전 단계를 똑같은 문제로 접근하려 할 때</a:t>
-            </a:r>
-            <a:endParaRPr lang="en-US" altLang="ko-KR" dirty="0"/>
-          </a:p>
-        </p:txBody>
-      </p:sp>
+      <mc:AlternateContent xmlns:mc="http://schemas.openxmlformats.org/markup-compatibility/2006" xmlns:a14="http://schemas.microsoft.com/office/drawing/2010/main">
+        <mc:Choice Requires="a14">
+          <p:sp>
+            <p:nvSpPr>
+              <p:cNvPr id="3" name="내용 개체 틀 2">
+                <a:extLst>
+                  <a:ext uri="{FF2B5EF4-FFF2-40B4-BE49-F238E27FC236}">
+                    <a16:creationId xmlns:a16="http://schemas.microsoft.com/office/drawing/2014/main" id="{1EF022A7-4B37-37DD-155C-571C7FDE91C1}"/>
+                  </a:ext>
+                </a:extLst>
+              </p:cNvPr>
+              <p:cNvSpPr>
+                <a:spLocks noGrp="1"/>
+              </p:cNvSpPr>
+              <p:nvPr>
+                <p:ph idx="1"/>
+              </p:nvPr>
+            </p:nvSpPr>
+            <p:spPr>
+              <a:xfrm>
+                <a:off x="838200" y="1414732"/>
+                <a:ext cx="10515600" cy="4750094"/>
+              </a:xfrm>
+            </p:spPr>
+            <p:txBody>
+              <a:bodyPr>
+                <a:normAutofit/>
+              </a:bodyPr>
+              <a:lstStyle/>
+              <a:p>
+                <a:r>
+                  <a:rPr lang="ko-KR" altLang="en-US" dirty="0"/>
+                  <a:t>접근하려는 문제가 똑같은 문제로 나눌 수 있을 때 유용함</a:t>
+                </a:r>
+                <a:endParaRPr lang="en-US" altLang="ko-KR" dirty="0"/>
+              </a:p>
+              <a:p>
+                <a:pPr lvl="1"/>
+                <a:r>
+                  <a:rPr lang="ko-KR" altLang="en-US" dirty="0" err="1"/>
+                  <a:t>점화식</a:t>
+                </a:r>
+                <a:r>
+                  <a:rPr lang="ko-KR" altLang="en-US" dirty="0"/>
+                  <a:t> 계산</a:t>
+                </a:r>
+                <a:r>
+                  <a:rPr lang="en-US" altLang="ko-KR" dirty="0"/>
+                  <a:t>, </a:t>
+                </a:r>
+                <a:r>
+                  <a:rPr lang="ko-KR" altLang="en-US" dirty="0"/>
+                  <a:t>완전 탐색</a:t>
+                </a:r>
+                <a:r>
+                  <a:rPr lang="en-US" altLang="ko-KR" dirty="0"/>
+                  <a:t>, </a:t>
+                </a:r>
+                <a:r>
+                  <a:rPr lang="ko-KR" altLang="en-US" dirty="0"/>
+                  <a:t>반복문으로 하기 힘든 작업</a:t>
+                </a:r>
+                <a:r>
+                  <a:rPr lang="en-US" altLang="ko-KR" dirty="0"/>
+                  <a:t> </a:t>
+                </a:r>
+                <a:r>
+                  <a:rPr lang="ko-KR" altLang="en-US" dirty="0"/>
+                  <a:t>등등에서 사용</a:t>
+                </a:r>
+                <a:endParaRPr lang="en-US" altLang="ko-KR" dirty="0"/>
+              </a:p>
+              <a:p>
+                <a:pPr lvl="1"/>
+                <a:r>
+                  <a:rPr lang="en-US" altLang="ko-KR" dirty="0"/>
+                  <a:t>ex. 1~5 </a:t>
+                </a:r>
+                <a:r>
+                  <a:rPr lang="ko-KR" altLang="en-US" dirty="0"/>
+                  <a:t>까지 </a:t>
+                </a:r>
+                <a:r>
+                  <a:rPr lang="ko-KR" altLang="en-US" dirty="0" err="1"/>
+                  <a:t>더하시오</a:t>
+                </a:r>
+                <a:endParaRPr lang="en-US" altLang="ko-KR" dirty="0"/>
+              </a:p>
+              <a:p>
+                <a:pPr lvl="2"/>
+                <a:r>
+                  <a:rPr lang="ko-KR" altLang="en-US" dirty="0"/>
+                  <a:t>이 문제는 </a:t>
+                </a:r>
+                <a:r>
+                  <a:rPr lang="en-US" altLang="ko-KR" dirty="0"/>
+                  <a:t>“1~4 </a:t>
+                </a:r>
+                <a:r>
+                  <a:rPr lang="ko-KR" altLang="en-US" dirty="0"/>
+                  <a:t>까지 더한 뒤</a:t>
+                </a:r>
+                <a:r>
+                  <a:rPr lang="en-US" altLang="ko-KR" dirty="0"/>
+                  <a:t> 5 </a:t>
+                </a:r>
+                <a:r>
+                  <a:rPr lang="ko-KR" altLang="en-US" dirty="0"/>
+                  <a:t>를 </a:t>
+                </a:r>
+                <a:r>
+                  <a:rPr lang="ko-KR" altLang="en-US" dirty="0" err="1"/>
+                  <a:t>더하시오</a:t>
+                </a:r>
+                <a:r>
+                  <a:rPr lang="en-US" altLang="ko-KR" dirty="0"/>
+                  <a:t>”</a:t>
+                </a:r>
+                <a:r>
+                  <a:rPr lang="ko-KR" altLang="en-US" dirty="0"/>
+                  <a:t>로 문제를 나눌 수 있음</a:t>
+                </a:r>
+                <a:endParaRPr lang="en-US" altLang="ko-KR" dirty="0"/>
+              </a:p>
+              <a:p>
+                <a:pPr lvl="2"/>
+                <a14:m>
+                  <m:oMath xmlns:m="http://schemas.openxmlformats.org/officeDocument/2006/math">
+                    <m:r>
+                      <a:rPr lang="en-US" altLang="ko-KR" i="1" smtClean="0">
+                        <a:latin typeface="Cambria Math" panose="02040503050406030204" pitchFamily="18" charset="0"/>
+                      </a:rPr>
+                      <m:t>𝑓</m:t>
+                    </m:r>
+                    <m:d>
+                      <m:dPr>
+                        <m:ctrlPr>
+                          <a:rPr lang="en-US" altLang="ko-KR" i="1">
+                            <a:latin typeface="Cambria Math" panose="02040503050406030204" pitchFamily="18" charset="0"/>
+                          </a:rPr>
+                        </m:ctrlPr>
+                      </m:dPr>
+                      <m:e>
+                        <m:r>
+                          <a:rPr lang="en-US" altLang="ko-KR" i="1">
+                            <a:latin typeface="Cambria Math" panose="02040503050406030204" pitchFamily="18" charset="0"/>
+                          </a:rPr>
+                          <m:t>𝑛</m:t>
+                        </m:r>
+                      </m:e>
+                    </m:d>
+                    <m:r>
+                      <a:rPr lang="en-US" altLang="ko-KR" i="1">
+                        <a:latin typeface="Cambria Math" panose="02040503050406030204" pitchFamily="18" charset="0"/>
+                      </a:rPr>
+                      <m:t>=</m:t>
+                    </m:r>
+                    <m:r>
+                      <a:rPr lang="en-US" altLang="ko-KR" i="1">
+                        <a:latin typeface="Cambria Math" panose="02040503050406030204" pitchFamily="18" charset="0"/>
+                      </a:rPr>
+                      <m:t>𝑓</m:t>
+                    </m:r>
+                    <m:d>
+                      <m:dPr>
+                        <m:ctrlPr>
+                          <a:rPr lang="en-US" altLang="ko-KR" i="1">
+                            <a:latin typeface="Cambria Math" panose="02040503050406030204" pitchFamily="18" charset="0"/>
+                          </a:rPr>
+                        </m:ctrlPr>
+                      </m:dPr>
+                      <m:e>
+                        <m:r>
+                          <a:rPr lang="en-US" altLang="ko-KR" b="0" i="1" smtClean="0">
+                            <a:latin typeface="Cambria Math" panose="02040503050406030204" pitchFamily="18" charset="0"/>
+                          </a:rPr>
+                          <m:t>𝑛</m:t>
+                        </m:r>
+                        <m:r>
+                          <a:rPr lang="en-US" altLang="ko-KR" i="1">
+                            <a:latin typeface="Cambria Math" panose="02040503050406030204" pitchFamily="18" charset="0"/>
+                          </a:rPr>
+                          <m:t>−1</m:t>
+                        </m:r>
+                      </m:e>
+                    </m:d>
+                    <m:r>
+                      <a:rPr lang="en-US" altLang="ko-KR" i="1">
+                        <a:latin typeface="Cambria Math" panose="02040503050406030204" pitchFamily="18" charset="0"/>
+                      </a:rPr>
+                      <m:t>+</m:t>
+                    </m:r>
+                    <m:r>
+                      <a:rPr lang="en-US" altLang="ko-KR" b="0" i="1" smtClean="0">
+                        <a:latin typeface="Cambria Math" panose="02040503050406030204" pitchFamily="18" charset="0"/>
+                      </a:rPr>
+                      <m:t>𝑛</m:t>
+                    </m:r>
+                  </m:oMath>
+                </a14:m>
+                <a:endParaRPr lang="en-US" altLang="ko-KR" dirty="0"/>
+              </a:p>
+              <a:p>
+                <a:pPr lvl="1"/>
+                <a:r>
+                  <a:rPr lang="en-US" altLang="ko-KR" dirty="0"/>
+                  <a:t>ex. </a:t>
+                </a:r>
+                <a:r>
+                  <a:rPr lang="ko-KR" altLang="en-US" dirty="0"/>
+                  <a:t>피보나치 수열 구하기</a:t>
+                </a:r>
+                <a:endParaRPr lang="en-US" altLang="ko-KR" dirty="0"/>
+              </a:p>
+              <a:p>
+                <a:pPr lvl="2"/>
+                <a14:m>
+                  <m:oMath xmlns:m="http://schemas.openxmlformats.org/officeDocument/2006/math">
+                    <m:r>
+                      <a:rPr lang="en-US" altLang="ko-KR" b="0" i="1" smtClean="0">
+                        <a:latin typeface="Cambria Math" panose="02040503050406030204" pitchFamily="18" charset="0"/>
+                      </a:rPr>
+                      <m:t>𝑓</m:t>
+                    </m:r>
+                    <m:d>
+                      <m:dPr>
+                        <m:ctrlPr>
+                          <a:rPr lang="en-US" altLang="ko-KR" b="0" i="1" smtClean="0">
+                            <a:latin typeface="Cambria Math" panose="02040503050406030204" pitchFamily="18" charset="0"/>
+                          </a:rPr>
+                        </m:ctrlPr>
+                      </m:dPr>
+                      <m:e>
+                        <m:r>
+                          <a:rPr lang="en-US" altLang="ko-KR" i="1">
+                            <a:latin typeface="Cambria Math" panose="02040503050406030204" pitchFamily="18" charset="0"/>
+                          </a:rPr>
+                          <m:t>𝑛</m:t>
+                        </m:r>
+                      </m:e>
+                    </m:d>
+                    <m:r>
+                      <a:rPr lang="en-US" altLang="ko-KR" b="0" i="1" smtClean="0">
+                        <a:latin typeface="Cambria Math" panose="02040503050406030204" pitchFamily="18" charset="0"/>
+                      </a:rPr>
+                      <m:t>=</m:t>
+                    </m:r>
+                    <m:r>
+                      <a:rPr lang="en-US" altLang="ko-KR" b="0" i="1" smtClean="0">
+                        <a:latin typeface="Cambria Math" panose="02040503050406030204" pitchFamily="18" charset="0"/>
+                      </a:rPr>
+                      <m:t>𝑓</m:t>
+                    </m:r>
+                    <m:d>
+                      <m:dPr>
+                        <m:ctrlPr>
+                          <a:rPr lang="en-US" altLang="ko-KR" b="0" i="1" smtClean="0">
+                            <a:latin typeface="Cambria Math" panose="02040503050406030204" pitchFamily="18" charset="0"/>
+                          </a:rPr>
+                        </m:ctrlPr>
+                      </m:dPr>
+                      <m:e>
+                        <m:r>
+                          <a:rPr lang="en-US" altLang="ko-KR" i="1">
+                            <a:latin typeface="Cambria Math" panose="02040503050406030204" pitchFamily="18" charset="0"/>
+                          </a:rPr>
+                          <m:t>𝑛</m:t>
+                        </m:r>
+                        <m:r>
+                          <a:rPr lang="en-US" altLang="ko-KR" i="1">
+                            <a:latin typeface="Cambria Math" panose="02040503050406030204" pitchFamily="18" charset="0"/>
+                          </a:rPr>
+                          <m:t>−1</m:t>
+                        </m:r>
+                      </m:e>
+                    </m:d>
+                    <m:r>
+                      <a:rPr lang="en-US" altLang="ko-KR" b="0" i="1" smtClean="0">
+                        <a:latin typeface="Cambria Math" panose="02040503050406030204" pitchFamily="18" charset="0"/>
+                      </a:rPr>
+                      <m:t>+</m:t>
+                    </m:r>
+                    <m:r>
+                      <a:rPr lang="en-US" altLang="ko-KR" b="0" i="1" smtClean="0">
+                        <a:latin typeface="Cambria Math" panose="02040503050406030204" pitchFamily="18" charset="0"/>
+                      </a:rPr>
+                      <m:t>𝑓</m:t>
+                    </m:r>
+                    <m:d>
+                      <m:dPr>
+                        <m:ctrlPr>
+                          <a:rPr lang="en-US" altLang="ko-KR" b="0" i="1" smtClean="0">
+                            <a:latin typeface="Cambria Math" panose="02040503050406030204" pitchFamily="18" charset="0"/>
+                          </a:rPr>
+                        </m:ctrlPr>
+                      </m:dPr>
+                      <m:e>
+                        <m:r>
+                          <a:rPr lang="en-US" altLang="ko-KR" i="1">
+                            <a:latin typeface="Cambria Math" panose="02040503050406030204" pitchFamily="18" charset="0"/>
+                          </a:rPr>
+                          <m:t>𝑛</m:t>
+                        </m:r>
+                        <m:r>
+                          <a:rPr lang="en-US" altLang="ko-KR" i="1">
+                            <a:latin typeface="Cambria Math" panose="02040503050406030204" pitchFamily="18" charset="0"/>
+                          </a:rPr>
+                          <m:t>−2</m:t>
+                        </m:r>
+                      </m:e>
+                    </m:d>
+                  </m:oMath>
+                </a14:m>
+                <a:endParaRPr lang="en-US" altLang="ko-KR" dirty="0"/>
+              </a:p>
+              <a:p>
+                <a:pPr lvl="1"/>
+                <a14:m>
+                  <m:oMath xmlns:m="http://schemas.openxmlformats.org/officeDocument/2006/math">
+                    <m:r>
+                      <m:rPr>
+                        <m:nor/>
+                      </m:rPr>
+                      <a:rPr lang="en-US" altLang="ko-KR" dirty="0"/>
+                      <m:t>ex</m:t>
+                    </m:r>
+                    <m:r>
+                      <m:rPr>
+                        <m:nor/>
+                      </m:rPr>
+                      <a:rPr lang="en-US" altLang="ko-KR" dirty="0"/>
+                      <m:t>. </m:t>
+                    </m:r>
+                    <m:r>
+                      <a:rPr lang="ko-KR" altLang="en-US" i="1" dirty="0">
+                        <a:latin typeface="Cambria Math" panose="02040503050406030204" pitchFamily="18" charset="0"/>
+                      </a:rPr>
+                      <m:t>팩토리얼</m:t>
+                    </m:r>
+                    <m:r>
+                      <m:rPr>
+                        <m:nor/>
+                      </m:rPr>
+                      <a:rPr lang="ko-KR" altLang="en-US" dirty="0"/>
+                      <m:t> 구하기</m:t>
+                    </m:r>
+                  </m:oMath>
+                </a14:m>
+                <a:endParaRPr lang="en-US" altLang="ko-KR" dirty="0"/>
+              </a:p>
+              <a:p>
+                <a:pPr lvl="2"/>
+                <a14:m>
+                  <m:oMath xmlns:m="http://schemas.openxmlformats.org/officeDocument/2006/math">
+                    <m:r>
+                      <a:rPr lang="en-US" altLang="ko-KR" i="1">
+                        <a:latin typeface="Cambria Math" panose="02040503050406030204" pitchFamily="18" charset="0"/>
+                      </a:rPr>
+                      <m:t>𝑓</m:t>
+                    </m:r>
+                    <m:d>
+                      <m:dPr>
+                        <m:ctrlPr>
+                          <a:rPr lang="en-US" altLang="ko-KR" i="1">
+                            <a:latin typeface="Cambria Math" panose="02040503050406030204" pitchFamily="18" charset="0"/>
+                          </a:rPr>
+                        </m:ctrlPr>
+                      </m:dPr>
+                      <m:e>
+                        <m:r>
+                          <a:rPr lang="en-US" altLang="ko-KR" i="1">
+                            <a:latin typeface="Cambria Math" panose="02040503050406030204" pitchFamily="18" charset="0"/>
+                          </a:rPr>
+                          <m:t>𝑛</m:t>
+                        </m:r>
+                      </m:e>
+                    </m:d>
+                    <m:r>
+                      <a:rPr lang="en-US" altLang="ko-KR" i="1">
+                        <a:latin typeface="Cambria Math" panose="02040503050406030204" pitchFamily="18" charset="0"/>
+                      </a:rPr>
+                      <m:t>=</m:t>
+                    </m:r>
+                    <m:r>
+                      <a:rPr lang="en-US" altLang="ko-KR" i="1">
+                        <a:latin typeface="Cambria Math" panose="02040503050406030204" pitchFamily="18" charset="0"/>
+                      </a:rPr>
+                      <m:t>𝑓</m:t>
+                    </m:r>
+                    <m:d>
+                      <m:dPr>
+                        <m:ctrlPr>
+                          <a:rPr lang="en-US" altLang="ko-KR" i="1">
+                            <a:latin typeface="Cambria Math" panose="02040503050406030204" pitchFamily="18" charset="0"/>
+                          </a:rPr>
+                        </m:ctrlPr>
+                      </m:dPr>
+                      <m:e>
+                        <m:r>
+                          <a:rPr lang="en-US" altLang="ko-KR" i="1">
+                            <a:latin typeface="Cambria Math" panose="02040503050406030204" pitchFamily="18" charset="0"/>
+                          </a:rPr>
+                          <m:t>𝑛</m:t>
+                        </m:r>
+                        <m:r>
+                          <a:rPr lang="en-US" altLang="ko-KR" i="1">
+                            <a:latin typeface="Cambria Math" panose="02040503050406030204" pitchFamily="18" charset="0"/>
+                          </a:rPr>
+                          <m:t>−1</m:t>
+                        </m:r>
+                      </m:e>
+                    </m:d>
+                    <m:r>
+                      <a:rPr lang="en-US" altLang="ko-KR" i="1" smtClean="0">
+                        <a:latin typeface="Cambria Math" panose="02040503050406030204" pitchFamily="18" charset="0"/>
+                        <a:ea typeface="Cambria Math" panose="02040503050406030204" pitchFamily="18" charset="0"/>
+                      </a:rPr>
+                      <m:t>×</m:t>
+                    </m:r>
+                    <m:r>
+                      <a:rPr lang="en-US" altLang="ko-KR" b="0" i="1" smtClean="0">
+                        <a:latin typeface="Cambria Math" panose="02040503050406030204" pitchFamily="18" charset="0"/>
+                        <a:ea typeface="Cambria Math" panose="02040503050406030204" pitchFamily="18" charset="0"/>
+                      </a:rPr>
+                      <m:t> </m:t>
+                    </m:r>
+                    <m:r>
+                      <a:rPr lang="en-US" altLang="ko-KR" b="0" i="1" smtClean="0">
+                        <a:latin typeface="Cambria Math" panose="02040503050406030204" pitchFamily="18" charset="0"/>
+                        <a:ea typeface="Cambria Math" panose="02040503050406030204" pitchFamily="18" charset="0"/>
+                      </a:rPr>
+                      <m:t>𝑛</m:t>
+                    </m:r>
+                  </m:oMath>
+                </a14:m>
+                <a:endParaRPr lang="en-US" altLang="ko-KR" dirty="0"/>
+              </a:p>
+              <a:p>
+                <a:r>
+                  <a:rPr lang="ko-KR" altLang="en-US" dirty="0"/>
+                  <a:t>접근하려는 문제를 단계별로 접근할 때</a:t>
+                </a:r>
+                <a:r>
+                  <a:rPr lang="en-US" altLang="ko-KR" dirty="0"/>
+                  <a:t>, </a:t>
+                </a:r>
+                <a:r>
+                  <a:rPr lang="ko-KR" altLang="en-US" dirty="0"/>
+                  <a:t>이전 단계를 똑같은 문제로 접근하려 할 때</a:t>
+                </a:r>
+                <a:endParaRPr lang="en-US" altLang="ko-KR" dirty="0"/>
+              </a:p>
+            </p:txBody>
+          </p:sp>
+        </mc:Choice>
+        <mc:Fallback xmlns="">
+          <p:sp>
+            <p:nvSpPr>
+              <p:cNvPr id="3" name="내용 개체 틀 2">
+                <a:extLst>
+                  <a:ext uri="{FF2B5EF4-FFF2-40B4-BE49-F238E27FC236}">
+                    <a16:creationId xmlns:a16="http://schemas.microsoft.com/office/drawing/2014/main" id="{1EF022A7-4B37-37DD-155C-571C7FDE91C1}"/>
+                  </a:ext>
+                </a:extLst>
+              </p:cNvPr>
+              <p:cNvSpPr>
+                <a:spLocks noGrp="1" noRot="1" noChangeAspect="1" noMove="1" noResize="1" noEditPoints="1" noAdjustHandles="1" noChangeArrowheads="1" noChangeShapeType="1" noTextEdit="1"/>
+              </p:cNvSpPr>
+              <p:nvPr>
+                <p:ph idx="1"/>
+              </p:nvPr>
+            </p:nvSpPr>
+            <p:spPr>
+              <a:xfrm>
+                <a:off x="838200" y="1414732"/>
+                <a:ext cx="10515600" cy="4750094"/>
+              </a:xfrm>
+              <a:blipFill>
+                <a:blip r:embed="rId2"/>
+                <a:stretch>
+                  <a:fillRect l="-1043" t="-2182"/>
+                </a:stretch>
+              </a:blipFill>
+            </p:spPr>
+            <p:txBody>
+              <a:bodyPr/>
+              <a:lstStyle/>
+              <a:p>
+                <a:r>
+                  <a:rPr lang="ko-KR" altLang="en-US">
+                    <a:noFill/>
+                  </a:rPr>
+                  <a:t> </a:t>
+                </a:r>
+              </a:p>
+            </p:txBody>
+          </p:sp>
+        </mc:Fallback>
+      </mc:AlternateContent>
     </p:spTree>
     <p:extLst>
       <p:ext uri="{BB962C8B-B14F-4D97-AF65-F5344CB8AC3E}">
@@ -4763,7 +7497,438 @@
 </p:sld>
 </file>
 
+<file path=ppt/slides/slide4.xml><?xml version="1.0" encoding="utf-8"?>
+<p:sld xmlns:a="http://schemas.openxmlformats.org/drawingml/2006/main" xmlns:r="http://schemas.openxmlformats.org/officeDocument/2006/relationships" xmlns:p="http://schemas.openxmlformats.org/presentationml/2006/main">
+  <p:cSld>
+    <p:spTree>
+      <p:nvGrpSpPr>
+        <p:cNvPr id="1" name="">
+          <a:extLst>
+            <a:ext uri="{FF2B5EF4-FFF2-40B4-BE49-F238E27FC236}">
+              <a16:creationId xmlns:a16="http://schemas.microsoft.com/office/drawing/2014/main" id="{FB230E1D-ABAE-F174-78ED-0E6E6247CE59}"/>
+            </a:ext>
+          </a:extLst>
+        </p:cNvPr>
+        <p:cNvGrpSpPr/>
+        <p:nvPr/>
+      </p:nvGrpSpPr>
+      <p:grpSpPr>
+        <a:xfrm>
+          <a:off x="0" y="0"/>
+          <a:ext cx="0" cy="0"/>
+          <a:chOff x="0" y="0"/>
+          <a:chExt cx="0" cy="0"/>
+        </a:xfrm>
+      </p:grpSpPr>
+      <p:sp>
+        <p:nvSpPr>
+          <p:cNvPr id="2" name="제목 1">
+            <a:extLst>
+              <a:ext uri="{FF2B5EF4-FFF2-40B4-BE49-F238E27FC236}">
+                <a16:creationId xmlns:a16="http://schemas.microsoft.com/office/drawing/2014/main" id="{318E5FEC-E25C-54B6-6279-BCD72474138F}"/>
+              </a:ext>
+            </a:extLst>
+          </p:cNvPr>
+          <p:cNvSpPr>
+            <a:spLocks noGrp="1"/>
+          </p:cNvSpPr>
+          <p:nvPr>
+            <p:ph type="title"/>
+          </p:nvPr>
+        </p:nvSpPr>
+        <p:spPr/>
+        <p:txBody>
+          <a:bodyPr/>
+          <a:lstStyle/>
+          <a:p>
+            <a:r>
+              <a:rPr lang="ko-KR" altLang="en-US" dirty="0"/>
+              <a:t>재귀</a:t>
+            </a:r>
+          </a:p>
+        </p:txBody>
+      </p:sp>
+      <p:sp>
+        <p:nvSpPr>
+          <p:cNvPr id="3" name="내용 개체 틀 2">
+            <a:extLst>
+              <a:ext uri="{FF2B5EF4-FFF2-40B4-BE49-F238E27FC236}">
+                <a16:creationId xmlns:a16="http://schemas.microsoft.com/office/drawing/2014/main" id="{B33D03D8-7AB3-D69A-5AFE-D5D50E294684}"/>
+              </a:ext>
+            </a:extLst>
+          </p:cNvPr>
+          <p:cNvSpPr>
+            <a:spLocks noGrp="1"/>
+          </p:cNvSpPr>
+          <p:nvPr>
+            <p:ph idx="1"/>
+          </p:nvPr>
+        </p:nvSpPr>
+        <p:spPr/>
+        <p:txBody>
+          <a:bodyPr/>
+          <a:lstStyle/>
+          <a:p>
+            <a:r>
+              <a:rPr lang="ko-KR" altLang="en-US" dirty="0"/>
+              <a:t>베이스 케이스</a:t>
+            </a:r>
+            <a:r>
+              <a:rPr lang="en-US" altLang="ko-KR" dirty="0"/>
+              <a:t>: </a:t>
+            </a:r>
+            <a:r>
+              <a:rPr lang="ko-KR" altLang="en-US" dirty="0"/>
+              <a:t>재귀 호출을 멈추는 조건</a:t>
+            </a:r>
+            <a:endParaRPr lang="en-US" altLang="ko-KR" dirty="0"/>
+          </a:p>
+          <a:p>
+            <a:pPr lvl="1"/>
+            <a:r>
+              <a:rPr lang="ko-KR" altLang="en-US" dirty="0"/>
+              <a:t>초기값을 직접 알 수 있는 경우</a:t>
+            </a:r>
+          </a:p>
+          <a:p>
+            <a:pPr lvl="1"/>
+            <a:r>
+              <a:rPr lang="ko-KR" altLang="en-US" dirty="0"/>
+              <a:t>손으로 쉽게 풀 수 있는 수준까지 줄어든 경우</a:t>
+            </a:r>
+          </a:p>
+          <a:p>
+            <a:pPr lvl="1"/>
+            <a:r>
+              <a:rPr lang="ko-KR" altLang="en-US" dirty="0"/>
+              <a:t>자명하게 답을 알 수 있는 단계</a:t>
+            </a:r>
+          </a:p>
+          <a:p>
+            <a:endParaRPr lang="en-US" altLang="ko-KR" dirty="0"/>
+          </a:p>
+          <a:p>
+            <a:r>
+              <a:rPr lang="ko-KR" altLang="en-US" dirty="0"/>
+              <a:t>이전 단계까지의 과정이 잘 수행되었다고 </a:t>
+            </a:r>
+            <a:r>
+              <a:rPr lang="ko-KR" altLang="en-US" dirty="0">
+                <a:solidFill>
+                  <a:srgbClr val="FF0000"/>
+                </a:solidFill>
+              </a:rPr>
+              <a:t>믿고</a:t>
+            </a:r>
+            <a:r>
+              <a:rPr lang="ko-KR" altLang="en-US" dirty="0"/>
+              <a:t> 다음 단계를 수행함을 전제함</a:t>
+            </a:r>
+            <a:endParaRPr lang="en-US" altLang="ko-KR" dirty="0"/>
+          </a:p>
+          <a:p>
+            <a:endParaRPr lang="en-US" altLang="ko-KR" dirty="0"/>
+          </a:p>
+          <a:p>
+            <a:endParaRPr lang="en-US" altLang="ko-KR" dirty="0"/>
+          </a:p>
+        </p:txBody>
+      </p:sp>
+    </p:spTree>
+    <p:extLst>
+      <p:ext uri="{BB962C8B-B14F-4D97-AF65-F5344CB8AC3E}">
+        <p14:creationId xmlns:p14="http://schemas.microsoft.com/office/powerpoint/2010/main" val="3360602510"/>
+      </p:ext>
+    </p:extLst>
+  </p:cSld>
+  <p:clrMapOvr>
+    <a:masterClrMapping/>
+  </p:clrMapOvr>
+</p:sld>
+</file>
+
 <file path=ppt/slides/slide5.xml><?xml version="1.0" encoding="utf-8"?>
+<p:sld xmlns:a="http://schemas.openxmlformats.org/drawingml/2006/main" xmlns:r="http://schemas.openxmlformats.org/officeDocument/2006/relationships" xmlns:p="http://schemas.openxmlformats.org/presentationml/2006/main">
+  <p:cSld>
+    <p:spTree>
+      <p:nvGrpSpPr>
+        <p:cNvPr id="1" name="">
+          <a:extLst>
+            <a:ext uri="{FF2B5EF4-FFF2-40B4-BE49-F238E27FC236}">
+              <a16:creationId xmlns:a16="http://schemas.microsoft.com/office/drawing/2014/main" id="{E23F2876-93FD-D4B4-4B16-61CA342426FC}"/>
+            </a:ext>
+          </a:extLst>
+        </p:cNvPr>
+        <p:cNvGrpSpPr/>
+        <p:nvPr/>
+      </p:nvGrpSpPr>
+      <p:grpSpPr>
+        <a:xfrm>
+          <a:off x="0" y="0"/>
+          <a:ext cx="0" cy="0"/>
+          <a:chOff x="0" y="0"/>
+          <a:chExt cx="0" cy="0"/>
+        </a:xfrm>
+      </p:grpSpPr>
+      <p:sp>
+        <p:nvSpPr>
+          <p:cNvPr id="2" name="제목 1">
+            <a:extLst>
+              <a:ext uri="{FF2B5EF4-FFF2-40B4-BE49-F238E27FC236}">
+                <a16:creationId xmlns:a16="http://schemas.microsoft.com/office/drawing/2014/main" id="{ED204457-FCE4-E436-79BA-3B9B19325018}"/>
+              </a:ext>
+            </a:extLst>
+          </p:cNvPr>
+          <p:cNvSpPr>
+            <a:spLocks noGrp="1"/>
+          </p:cNvSpPr>
+          <p:nvPr>
+            <p:ph type="title"/>
+          </p:nvPr>
+        </p:nvSpPr>
+        <p:spPr/>
+        <p:txBody>
+          <a:bodyPr/>
+          <a:lstStyle/>
+          <a:p>
+            <a:r>
+              <a:rPr lang="ko-KR" altLang="en-US" dirty="0"/>
+              <a:t>재귀</a:t>
+            </a:r>
+          </a:p>
+        </p:txBody>
+      </p:sp>
+      <p:sp>
+        <p:nvSpPr>
+          <p:cNvPr id="3" name="내용 개체 틀 2">
+            <a:extLst>
+              <a:ext uri="{FF2B5EF4-FFF2-40B4-BE49-F238E27FC236}">
+                <a16:creationId xmlns:a16="http://schemas.microsoft.com/office/drawing/2014/main" id="{3913B4A5-9903-9B13-4E1E-0B92ACEC130D}"/>
+              </a:ext>
+            </a:extLst>
+          </p:cNvPr>
+          <p:cNvSpPr>
+            <a:spLocks noGrp="1"/>
+          </p:cNvSpPr>
+          <p:nvPr>
+            <p:ph idx="1"/>
+          </p:nvPr>
+        </p:nvSpPr>
+        <p:spPr/>
+        <p:txBody>
+          <a:bodyPr/>
+          <a:lstStyle/>
+          <a:p>
+            <a:pPr marL="0" indent="0">
+              <a:buNone/>
+            </a:pPr>
+            <a:endParaRPr lang="en-US" altLang="ko-KR" dirty="0"/>
+          </a:p>
+          <a:p>
+            <a:endParaRPr lang="en-US" altLang="ko-KR" dirty="0"/>
+          </a:p>
+        </p:txBody>
+      </p:sp>
+      <p:sp>
+        <p:nvSpPr>
+          <p:cNvPr id="5" name="TextBox 4">
+            <a:extLst>
+              <a:ext uri="{FF2B5EF4-FFF2-40B4-BE49-F238E27FC236}">
+                <a16:creationId xmlns:a16="http://schemas.microsoft.com/office/drawing/2014/main" id="{20CFE835-14AF-FEBD-3692-568DF862A655}"/>
+              </a:ext>
+            </a:extLst>
+          </p:cNvPr>
+          <p:cNvSpPr txBox="1"/>
+          <p:nvPr/>
+        </p:nvSpPr>
+        <p:spPr>
+          <a:xfrm>
+            <a:off x="2594610" y="1690688"/>
+            <a:ext cx="7002780" cy="4247317"/>
+          </a:xfrm>
+          <a:prstGeom prst="rect">
+            <a:avLst/>
+          </a:prstGeom>
+          <a:noFill/>
+        </p:spPr>
+        <p:txBody>
+          <a:bodyPr wrap="square">
+            <a:spAutoFit/>
+          </a:bodyPr>
+          <a:lstStyle/>
+          <a:p>
+            <a:r>
+              <a:rPr lang="en-US" altLang="ko-KR" dirty="0"/>
+              <a:t>long </a:t>
+            </a:r>
+            <a:r>
+              <a:rPr lang="en-US" altLang="ko-KR" dirty="0" err="1"/>
+              <a:t>long</a:t>
+            </a:r>
+            <a:r>
+              <a:rPr lang="en-US" altLang="ko-KR" dirty="0"/>
+              <a:t> </a:t>
+            </a:r>
+            <a:r>
+              <a:rPr lang="en-US" altLang="ko-KR" dirty="0" err="1"/>
+              <a:t>getSum</a:t>
+            </a:r>
+            <a:r>
+              <a:rPr lang="en-US" altLang="ko-KR" dirty="0"/>
+              <a:t>(int n) {</a:t>
+            </a:r>
+          </a:p>
+          <a:p>
+            <a:r>
+              <a:rPr lang="en-US" altLang="ko-KR" dirty="0"/>
+              <a:t>    if (n == 1) </a:t>
+            </a:r>
+            <a:r>
+              <a:rPr lang="en-US" altLang="ko-KR" dirty="0">
+                <a:solidFill>
+                  <a:schemeClr val="accent6"/>
+                </a:solidFill>
+              </a:rPr>
+              <a:t>// base case</a:t>
+            </a:r>
+          </a:p>
+          <a:p>
+            <a:r>
+              <a:rPr lang="en-US" altLang="ko-KR" dirty="0"/>
+              <a:t>        return 1;</a:t>
+            </a:r>
+          </a:p>
+          <a:p>
+            <a:r>
+              <a:rPr lang="en-US" altLang="ko-KR" dirty="0"/>
+              <a:t>    else {</a:t>
+            </a:r>
+            <a:endParaRPr lang="en-US" altLang="ko-KR" dirty="0">
+              <a:solidFill>
+                <a:schemeClr val="accent6"/>
+              </a:solidFill>
+            </a:endParaRPr>
+          </a:p>
+          <a:p>
+            <a:r>
+              <a:rPr lang="en-US" altLang="ko-KR" dirty="0"/>
+              <a:t>        long </a:t>
+            </a:r>
+            <a:r>
+              <a:rPr lang="en-US" altLang="ko-KR" dirty="0" err="1"/>
+              <a:t>long</a:t>
+            </a:r>
+            <a:r>
+              <a:rPr lang="en-US" altLang="ko-KR" dirty="0"/>
+              <a:t> result = n + </a:t>
+            </a:r>
+            <a:r>
+              <a:rPr lang="en-US" altLang="ko-KR" dirty="0" err="1"/>
+              <a:t>getSum</a:t>
+            </a:r>
+            <a:r>
+              <a:rPr lang="en-US" altLang="ko-KR" dirty="0"/>
+              <a:t>(n - 1);</a:t>
+            </a:r>
+          </a:p>
+          <a:p>
+            <a:r>
+              <a:rPr lang="en-US" altLang="ko-KR" dirty="0"/>
+              <a:t>        return result;</a:t>
+            </a:r>
+          </a:p>
+          <a:p>
+            <a:r>
+              <a:rPr lang="en-US" altLang="ko-KR" dirty="0"/>
+              <a:t>    } </a:t>
+            </a:r>
+          </a:p>
+          <a:p>
+            <a:r>
+              <a:rPr lang="en-US" altLang="ko-KR" dirty="0"/>
+              <a:t>}</a:t>
+            </a:r>
+          </a:p>
+          <a:p>
+            <a:endParaRPr lang="en-US" altLang="ko-KR" dirty="0"/>
+          </a:p>
+          <a:p>
+            <a:r>
+              <a:rPr lang="en-US" altLang="ko-KR" dirty="0"/>
+              <a:t>int main() {</a:t>
+            </a:r>
+          </a:p>
+          <a:p>
+            <a:r>
+              <a:rPr lang="en-US" altLang="ko-KR" dirty="0"/>
+              <a:t>    int x;</a:t>
+            </a:r>
+          </a:p>
+          <a:p>
+            <a:r>
+              <a:rPr lang="en-US" altLang="ko-KR" dirty="0"/>
+              <a:t>    </a:t>
+            </a:r>
+            <a:r>
+              <a:rPr lang="en-US" altLang="ko-KR" dirty="0" err="1"/>
+              <a:t>cin</a:t>
+            </a:r>
+            <a:r>
+              <a:rPr lang="en-US" altLang="ko-KR" dirty="0"/>
+              <a:t> &gt;&gt; x;</a:t>
+            </a:r>
+          </a:p>
+          <a:p>
+            <a:r>
+              <a:rPr lang="en-US" altLang="ko-KR" dirty="0"/>
+              <a:t>    </a:t>
+            </a:r>
+          </a:p>
+          <a:p>
+            <a:r>
+              <a:rPr lang="en-US" altLang="ko-KR" dirty="0"/>
+              <a:t>    </a:t>
+            </a:r>
+            <a:r>
+              <a:rPr lang="en-US" altLang="ko-KR" dirty="0" err="1"/>
+              <a:t>cout</a:t>
+            </a:r>
+            <a:r>
+              <a:rPr lang="en-US" altLang="ko-KR" dirty="0"/>
+              <a:t> &lt;&lt; </a:t>
+            </a:r>
+            <a:r>
+              <a:rPr lang="en-US" altLang="ko-KR" dirty="0" err="1"/>
+              <a:t>getSum</a:t>
+            </a:r>
+            <a:r>
+              <a:rPr lang="en-US" altLang="ko-KR" dirty="0"/>
+              <a:t>(x);</a:t>
+            </a:r>
+          </a:p>
+          <a:p>
+            <a:r>
+              <a:rPr lang="en-US" altLang="ko-KR" dirty="0"/>
+              <a:t>}</a:t>
+            </a:r>
+            <a:endParaRPr lang="ko-KR" altLang="en-US" dirty="0"/>
+          </a:p>
+        </p:txBody>
+      </p:sp>
+    </p:spTree>
+    <p:extLst>
+      <p:ext uri="{BB962C8B-B14F-4D97-AF65-F5344CB8AC3E}">
+        <p14:creationId xmlns:p14="http://schemas.microsoft.com/office/powerpoint/2010/main" val="2308434819"/>
+      </p:ext>
+    </p:extLst>
+  </p:cSld>
+  <p:clrMapOvr>
+    <a:masterClrMapping/>
+  </p:clrMapOvr>
+</p:sld>
+</file>
+
+<file path=ppt/slides/slide6.xml><?xml version="1.0" encoding="utf-8"?>
 <p:sld xmlns:a="http://schemas.openxmlformats.org/drawingml/2006/main" xmlns:r="http://schemas.openxmlformats.org/officeDocument/2006/relationships" xmlns:p="http://schemas.openxmlformats.org/presentationml/2006/main">
   <p:cSld>
     <p:spTree>
@@ -4985,7 +8150,7 @@
 </p:sld>
 </file>
 
-<file path=ppt/slides/slide6.xml><?xml version="1.0" encoding="utf-8"?>
+<file path=ppt/slides/slide7.xml><?xml version="1.0" encoding="utf-8"?>
 <p:sld xmlns:a="http://schemas.openxmlformats.org/drawingml/2006/main" xmlns:r="http://schemas.openxmlformats.org/officeDocument/2006/relationships" xmlns:p="http://schemas.openxmlformats.org/presentationml/2006/main">
   <p:cSld>
     <p:spTree>
@@ -5067,15 +8232,7 @@
             </a:r>
             <a:r>
               <a:rPr lang="ko-KR" altLang="en-US" dirty="0"/>
-              <a:t>재귀는 </a:t>
-            </a:r>
-            <a:r>
-              <a:rPr lang="ko-KR" altLang="en-US" dirty="0" err="1"/>
-              <a:t>왠만하면</a:t>
-            </a:r>
-            <a:r>
-              <a:rPr lang="ko-KR" altLang="en-US" dirty="0"/>
-              <a:t> 반복문으로 구현 가능</a:t>
+              <a:t>재귀는 웬만하면 반복문으로 구현 가능</a:t>
             </a:r>
             <a:r>
               <a:rPr lang="en-US" altLang="ko-KR" dirty="0"/>
@@ -5140,129 +8297,6 @@
     <p:extLst>
       <p:ext uri="{BB962C8B-B14F-4D97-AF65-F5344CB8AC3E}">
         <p14:creationId xmlns:p14="http://schemas.microsoft.com/office/powerpoint/2010/main" val="3911097667"/>
-      </p:ext>
-    </p:extLst>
-  </p:cSld>
-  <p:clrMapOvr>
-    <a:masterClrMapping/>
-  </p:clrMapOvr>
-</p:sld>
-</file>
-
-<file path=ppt/slides/slide7.xml><?xml version="1.0" encoding="utf-8"?>
-<p:sld xmlns:a="http://schemas.openxmlformats.org/drawingml/2006/main" xmlns:r="http://schemas.openxmlformats.org/officeDocument/2006/relationships" xmlns:p="http://schemas.openxmlformats.org/presentationml/2006/main">
-  <p:cSld>
-    <p:spTree>
-      <p:nvGrpSpPr>
-        <p:cNvPr id="1" name=""/>
-        <p:cNvGrpSpPr/>
-        <p:nvPr/>
-      </p:nvGrpSpPr>
-      <p:grpSpPr>
-        <a:xfrm>
-          <a:off x="0" y="0"/>
-          <a:ext cx="0" cy="0"/>
-          <a:chOff x="0" y="0"/>
-          <a:chExt cx="0" cy="0"/>
-        </a:xfrm>
-      </p:grpSpPr>
-      <p:sp>
-        <p:nvSpPr>
-          <p:cNvPr id="2" name="제목 1">
-            <a:extLst>
-              <a:ext uri="{FF2B5EF4-FFF2-40B4-BE49-F238E27FC236}">
-                <a16:creationId xmlns:a16="http://schemas.microsoft.com/office/drawing/2014/main" id="{4C128D03-8801-0780-5C49-CC0C4EF06186}"/>
-              </a:ext>
-            </a:extLst>
-          </p:cNvPr>
-          <p:cNvSpPr>
-            <a:spLocks noGrp="1"/>
-          </p:cNvSpPr>
-          <p:nvPr>
-            <p:ph type="title"/>
-          </p:nvPr>
-        </p:nvSpPr>
-        <p:spPr/>
-        <p:txBody>
-          <a:bodyPr/>
-          <a:lstStyle/>
-          <a:p>
-            <a:r>
-              <a:rPr lang="ko-KR" altLang="en-US" dirty="0"/>
-              <a:t>재귀</a:t>
-            </a:r>
-            <a:r>
-              <a:rPr lang="en-US" altLang="ko-KR" dirty="0"/>
-              <a:t> - </a:t>
-            </a:r>
-            <a:r>
-              <a:rPr lang="ko-KR" altLang="en-US" dirty="0"/>
-              <a:t>예시문제</a:t>
-            </a:r>
-          </a:p>
-        </p:txBody>
-      </p:sp>
-      <p:sp>
-        <p:nvSpPr>
-          <p:cNvPr id="3" name="내용 개체 틀 2">
-            <a:extLst>
-              <a:ext uri="{FF2B5EF4-FFF2-40B4-BE49-F238E27FC236}">
-                <a16:creationId xmlns:a16="http://schemas.microsoft.com/office/drawing/2014/main" id="{B00309BE-5CFA-FCAF-946C-C17A1465F650}"/>
-              </a:ext>
-            </a:extLst>
-          </p:cNvPr>
-          <p:cNvSpPr>
-            <a:spLocks noGrp="1"/>
-          </p:cNvSpPr>
-          <p:nvPr>
-            <p:ph idx="1"/>
-          </p:nvPr>
-        </p:nvSpPr>
-        <p:spPr/>
-        <p:txBody>
-          <a:bodyPr/>
-          <a:lstStyle/>
-          <a:p>
-            <a:r>
-              <a:rPr lang="ko-KR" altLang="en-US" dirty="0" err="1"/>
-              <a:t>팩토리얼</a:t>
-            </a:r>
-            <a:r>
-              <a:rPr lang="en-US" altLang="ko-KR" dirty="0"/>
-              <a:t>: </a:t>
-            </a:r>
-            <a:r>
-              <a:rPr lang="en-US" altLang="ko-KR" dirty="0">
-                <a:hlinkClick r:id="rId2"/>
-              </a:rPr>
-              <a:t>https://www.acmicpc.net/problem/27433</a:t>
-            </a:r>
-            <a:endParaRPr lang="en-US" altLang="ko-KR" dirty="0"/>
-          </a:p>
-          <a:p>
-            <a:pPr lvl="1"/>
-            <a:r>
-              <a:rPr lang="ko-KR" altLang="en-US" dirty="0"/>
-              <a:t>예시 답안 </a:t>
-            </a:r>
-            <a:r>
-              <a:rPr lang="en-US" altLang="ko-KR" dirty="0"/>
-              <a:t>(C++) : </a:t>
-            </a:r>
-            <a:r>
-              <a:rPr lang="en-US" altLang="ko-KR" dirty="0">
-                <a:hlinkClick r:id="rId3"/>
-              </a:rPr>
-              <a:t>http://boj.kr/274fa52aecb6428e8fdc743a57c05550</a:t>
-            </a:r>
-            <a:endParaRPr lang="en-US" altLang="ko-KR" dirty="0"/>
-          </a:p>
-        </p:txBody>
-      </p:sp>
-    </p:spTree>
-    <p:extLst>
-      <p:ext uri="{BB962C8B-B14F-4D97-AF65-F5344CB8AC3E}">
-        <p14:creationId xmlns:p14="http://schemas.microsoft.com/office/powerpoint/2010/main" val="4053323100"/>
       </p:ext>
     </p:extLst>
   </p:cSld>
@@ -5294,7 +8328,7 @@
           <p:cNvPr id="2" name="제목 1">
             <a:extLst>
               <a:ext uri="{FF2B5EF4-FFF2-40B4-BE49-F238E27FC236}">
-                <a16:creationId xmlns:a16="http://schemas.microsoft.com/office/drawing/2014/main" id="{AADA9F82-EC16-0D48-85A9-E2C8E1A85128}"/>
+                <a16:creationId xmlns:a16="http://schemas.microsoft.com/office/drawing/2014/main" id="{4C128D03-8801-0780-5C49-CC0C4EF06186}"/>
               </a:ext>
             </a:extLst>
           </p:cNvPr>
@@ -5312,7 +8346,15 @@
           <a:p>
             <a:r>
               <a:rPr lang="ko-KR" altLang="en-US" dirty="0"/>
-              <a:t>분할정복</a:t>
+              <a:t>재귀</a:t>
+            </a:r>
+            <a:r>
+              <a:rPr lang="en-US" altLang="ko-KR" dirty="0"/>
+              <a:t> - </a:t>
+            </a:r>
+            <a:r>
+              <a:rPr lang="ko-KR" altLang="en-US" dirty="0"/>
+              <a:t>예시문제</a:t>
             </a:r>
           </a:p>
         </p:txBody>
@@ -5322,7 +8364,7 @@
           <p:cNvPr id="3" name="내용 개체 틀 2">
             <a:extLst>
               <a:ext uri="{FF2B5EF4-FFF2-40B4-BE49-F238E27FC236}">
-                <a16:creationId xmlns:a16="http://schemas.microsoft.com/office/drawing/2014/main" id="{4354C819-00B0-66C3-EE34-1DC920762FB8}"/>
+                <a16:creationId xmlns:a16="http://schemas.microsoft.com/office/drawing/2014/main" id="{B00309BE-5CFA-FCAF-946C-C17A1465F650}"/>
               </a:ext>
             </a:extLst>
           </p:cNvPr>
@@ -5339,21 +8381,63 @@
           <a:lstStyle/>
           <a:p>
             <a:r>
+              <a:rPr lang="ko-KR" altLang="en-US" dirty="0" err="1"/>
+              <a:t>팩토리얼</a:t>
+            </a:r>
+            <a:r>
+              <a:rPr lang="en-US" altLang="ko-KR" dirty="0"/>
+              <a:t>: </a:t>
+            </a:r>
+            <a:r>
+              <a:rPr lang="en-US" altLang="ko-KR" dirty="0">
+                <a:hlinkClick r:id="rId2"/>
+              </a:rPr>
+              <a:t>https://www.acmicpc.net/problem/27433</a:t>
+            </a:r>
+            <a:endParaRPr lang="en-US" altLang="ko-KR" dirty="0"/>
+          </a:p>
+          <a:p>
+            <a:pPr lvl="1"/>
+            <a:r>
               <a:rPr lang="ko-KR" altLang="en-US" dirty="0"/>
-              <a:t>재귀로 풀 수 있는 </a:t>
-            </a:r>
-            <a:r>
-              <a:rPr lang="ko-KR" altLang="en-US"/>
-              <a:t>대표적인 예시 </a:t>
-            </a:r>
-            <a:endParaRPr lang="ko-KR" altLang="en-US" dirty="0"/>
+              <a:t>예시 답안 </a:t>
+            </a:r>
+            <a:r>
+              <a:rPr lang="en-US" altLang="ko-KR" dirty="0"/>
+              <a:t>(C++) : </a:t>
+            </a:r>
+            <a:r>
+              <a:rPr lang="en-US" altLang="ko-KR" dirty="0">
+                <a:hlinkClick r:id="rId3"/>
+              </a:rPr>
+              <a:t>http://boj.kr/274fa52aecb6428e8fdc743a57c05550</a:t>
+            </a:r>
+            <a:endParaRPr lang="en-US" altLang="ko-KR" dirty="0"/>
+          </a:p>
+          <a:p>
+            <a:pPr lvl="1"/>
+            <a:r>
+              <a:rPr lang="ko-KR" altLang="en-US" dirty="0"/>
+              <a:t>예시 답안 </a:t>
+            </a:r>
+            <a:r>
+              <a:rPr lang="en-US" altLang="ko-KR" dirty="0"/>
+              <a:t>(Java) : </a:t>
+            </a:r>
+            <a:r>
+              <a:rPr lang="en-US" altLang="ko-KR" dirty="0">
+                <a:hlinkClick r:id="rId4"/>
+              </a:rPr>
+              <a:t>http://boj.kr/17d872eff05a4296bf834aab54a9097d</a:t>
+            </a:r>
+            <a:endParaRPr lang="en-US" altLang="ko-KR" dirty="0"/>
           </a:p>
         </p:txBody>
       </p:sp>
     </p:spTree>
     <p:extLst>
       <p:ext uri="{BB962C8B-B14F-4D97-AF65-F5344CB8AC3E}">
-        <p14:creationId xmlns:p14="http://schemas.microsoft.com/office/powerpoint/2010/main" val="1132999277"/>
+        <p14:creationId xmlns:p14="http://schemas.microsoft.com/office/powerpoint/2010/main" val="4053323100"/>
       </p:ext>
     </p:extLst>
   </p:cSld>
@@ -5368,13 +8452,7 @@
   <p:cSld>
     <p:spTree>
       <p:nvGrpSpPr>
-        <p:cNvPr id="1" name="">
-          <a:extLst>
-            <a:ext uri="{FF2B5EF4-FFF2-40B4-BE49-F238E27FC236}">
-              <a16:creationId xmlns:a16="http://schemas.microsoft.com/office/drawing/2014/main" id="{4C94D3B2-501E-0EA5-ADB0-5238D20F807C}"/>
-            </a:ext>
-          </a:extLst>
-        </p:cNvPr>
+        <p:cNvPr id="1" name=""/>
         <p:cNvGrpSpPr/>
         <p:nvPr/>
       </p:nvGrpSpPr>
@@ -5391,7 +8469,7 @@
           <p:cNvPr id="2" name="제목 1">
             <a:extLst>
               <a:ext uri="{FF2B5EF4-FFF2-40B4-BE49-F238E27FC236}">
-                <a16:creationId xmlns:a16="http://schemas.microsoft.com/office/drawing/2014/main" id="{C78CDDE2-7520-0824-BF4E-918817441F67}"/>
+                <a16:creationId xmlns:a16="http://schemas.microsoft.com/office/drawing/2014/main" id="{AADA9F82-EC16-0D48-85A9-E2C8E1A85128}"/>
               </a:ext>
             </a:extLst>
           </p:cNvPr>
@@ -5409,7 +8487,7 @@
           <a:p>
             <a:r>
               <a:rPr lang="ko-KR" altLang="en-US" dirty="0"/>
-              <a:t>복습 문제</a:t>
+              <a:t>분할 정복</a:t>
             </a:r>
           </a:p>
         </p:txBody>
@@ -5419,7 +8497,7 @@
           <p:cNvPr id="3" name="내용 개체 틀 2">
             <a:extLst>
               <a:ext uri="{FF2B5EF4-FFF2-40B4-BE49-F238E27FC236}">
-                <a16:creationId xmlns:a16="http://schemas.microsoft.com/office/drawing/2014/main" id="{7CDCE6C2-8E1A-6997-8C8E-B3BF38CD074B}"/>
+                <a16:creationId xmlns:a16="http://schemas.microsoft.com/office/drawing/2014/main" id="{4354C819-00B0-66C3-EE34-1DC920762FB8}"/>
               </a:ext>
             </a:extLst>
           </p:cNvPr>
@@ -5437,38 +8515,71 @@
           <a:p>
             <a:r>
               <a:rPr lang="ko-KR" altLang="en-US" dirty="0"/>
-              <a:t>재귀 </a:t>
+              <a:t>분할</a:t>
             </a:r>
             <a:r>
               <a:rPr lang="en-US" altLang="ko-KR" dirty="0"/>
-              <a:t>: </a:t>
-            </a:r>
-            <a:r>
-              <a:rPr lang="en-US" altLang="ko-KR" dirty="0">
-                <a:hlinkClick r:id="rId2"/>
-              </a:rPr>
-              <a:t>https://www.acmicpc.net/step/19</a:t>
+              <a:t> - </a:t>
+            </a:r>
+            <a:r>
+              <a:rPr lang="ko-KR" altLang="en-US" dirty="0"/>
+              <a:t>큰 문제를 여러 개의 작은</a:t>
+            </a:r>
+            <a:r>
+              <a:rPr lang="en-US" altLang="ko-KR" dirty="0"/>
+              <a:t> </a:t>
+            </a:r>
+            <a:r>
+              <a:rPr lang="ko-KR" altLang="en-US" dirty="0"/>
+              <a:t>문제로</a:t>
+            </a:r>
+            <a:r>
+              <a:rPr lang="en-US" altLang="ko-KR" dirty="0"/>
+              <a:t> </a:t>
+            </a:r>
+            <a:r>
+              <a:rPr lang="ko-KR" altLang="en-US" dirty="0"/>
+              <a:t>쪼갠 후</a:t>
             </a:r>
             <a:endParaRPr lang="en-US" altLang="ko-KR" dirty="0"/>
           </a:p>
           <a:p>
             <a:r>
               <a:rPr lang="ko-KR" altLang="en-US" dirty="0"/>
-              <a:t>분할 정복 </a:t>
+              <a:t>정복</a:t>
             </a:r>
             <a:r>
               <a:rPr lang="en-US" altLang="ko-KR" dirty="0"/>
-              <a:t>: </a:t>
-            </a:r>
-            <a:r>
-              <a:rPr lang="en-US" altLang="ko-KR" dirty="0">
-                <a:hlinkClick r:id="rId3"/>
-              </a:rPr>
-              <a:t>https://www.acmicpc.net/step/20</a:t>
+              <a:t> - </a:t>
+            </a:r>
+            <a:r>
+              <a:rPr lang="ko-KR" altLang="en-US" dirty="0"/>
+              <a:t>작은 문제들의 답을 이용해 큰 문제의 답을 구하는 방법</a:t>
             </a:r>
             <a:endParaRPr lang="en-US" altLang="ko-KR" dirty="0"/>
           </a:p>
           <a:p>
+            <a:endParaRPr lang="en-US" altLang="ko-KR" dirty="0"/>
+          </a:p>
+          <a:p>
+            <a:r>
+              <a:rPr lang="ko-KR" altLang="en-US" dirty="0"/>
+              <a:t>문제의 크기가 충분히 작으면 직접 해결한다</a:t>
+            </a:r>
+            <a:r>
+              <a:rPr lang="en-US" altLang="ko-KR" dirty="0"/>
+              <a:t>.</a:t>
+            </a:r>
+          </a:p>
+          <a:p>
+            <a:r>
+              <a:rPr lang="ko-KR" altLang="en-US" dirty="0"/>
+              <a:t>그렇지 않으면 작은 문제 여러 개로 분할해 해결한 후 그 결과를 이용해 문제를 해결한다</a:t>
+            </a:r>
+            <a:r>
+              <a:rPr lang="en-US" altLang="ko-KR" dirty="0"/>
+              <a:t>.</a:t>
+            </a:r>
             <a:endParaRPr lang="ko-KR" altLang="en-US" dirty="0"/>
           </a:p>
         </p:txBody>
@@ -5476,7 +8587,7 @@
     </p:spTree>
     <p:extLst>
       <p:ext uri="{BB962C8B-B14F-4D97-AF65-F5344CB8AC3E}">
-        <p14:creationId xmlns:p14="http://schemas.microsoft.com/office/powerpoint/2010/main" val="1355727632"/>
+        <p14:creationId xmlns:p14="http://schemas.microsoft.com/office/powerpoint/2010/main" val="1132999277"/>
       </p:ext>
     </p:extLst>
   </p:cSld>
